--- a/docs/presentation/VoiceInput-Pro-平台介绍与验收演示稿.pptx
+++ b/docs/presentation/VoiceInput-Pro-平台介绍与验收演示稿.pptx
@@ -8307,8 +8307,8 @@
         </p:blipFill>
         <p:spPr>
           <a:xfrm>
-            <a:off x="1030821" y="1426464"/>
-            <a:ext cx="5546164" cy="4242816"/>
+            <a:off x="640080" y="1747118"/>
+            <a:ext cx="6327648" cy="3601507"/>
           </a:xfrm>
           <a:prstGeom prst="rect">
             <a:avLst/>

--- a/docs/presentation/VoiceInput-Pro-平台介绍与验收演示稿.pptx
+++ b/docs/presentation/VoiceInput-Pro-平台介绍与验收演示稿.pptx
@@ -1,24 +1,24 @@
 
 <file path=ppt/presentation.xml><?xml version="1.0" encoding="utf-8"?>
-<p:presentation xmlns:a="http://schemas.openxmlformats.org/drawingml/2006/main" xmlns:r="http://schemas.openxmlformats.org/officeDocument/2006/relationships" xmlns:p="http://schemas.openxmlformats.org/presentationml/2006/main" saveSubsetFonts="1" autoCompressPictures="0">
+<p:presentation xmlns:a="http://schemas.openxmlformats.org/drawingml/2006/main" xmlns:r="http://schemas.openxmlformats.org/officeDocument/2006/relationships" xmlns:p="http://schemas.openxmlformats.org/presentationml/2006/main" autoCompressPictures="0">
   <p:sldMasterIdLst>
     <p:sldMasterId id="2147483648" r:id="rId1"/>
   </p:sldMasterIdLst>
   <p:sldIdLst>
-    <p:sldId id="256" r:id="rId7"/>
-    <p:sldId id="257" r:id="rId8"/>
-    <p:sldId id="258" r:id="rId9"/>
-    <p:sldId id="259" r:id="rId10"/>
-    <p:sldId id="260" r:id="rId11"/>
-    <p:sldId id="261" r:id="rId12"/>
-    <p:sldId id="262" r:id="rId13"/>
-    <p:sldId id="263" r:id="rId14"/>
-    <p:sldId id="264" r:id="rId15"/>
-    <p:sldId id="265" r:id="rId16"/>
-    <p:sldId id="266" r:id="rId17"/>
-    <p:sldId id="267" r:id="rId18"/>
+    <p:sldId id="256" r:id="rId3"/>
+    <p:sldId id="257" r:id="rId4"/>
+    <p:sldId id="258" r:id="rId5"/>
+    <p:sldId id="259" r:id="rId6"/>
+    <p:sldId id="260" r:id="rId7"/>
+    <p:sldId id="261" r:id="rId8"/>
+    <p:sldId id="262" r:id="rId9"/>
+    <p:sldId id="263" r:id="rId10"/>
+    <p:sldId id="264" r:id="rId11"/>
+    <p:sldId id="265" r:id="rId12"/>
+    <p:sldId id="266" r:id="rId13"/>
+    <p:sldId id="267" r:id="rId14"/>
   </p:sldIdLst>
-  <p:sldSz cx="12191695" cy="6858000" type="screen4x3"/>
+  <p:sldSz cx="12191365" cy="6858000" type="screen4x3"/>
   <p:notesSz cx="6858000" cy="9144000"/>
   <p:defaultTextStyle>
     <a:defPPr>
@@ -115,6 +115,22 @@
       </a:defRPr>
     </a:lvl9pPr>
   </p:defaultTextStyle>
+  <p:extLst>
+    <p:ext uri="{EFAFB233-063F-42B5-8137-9DF3F51BA10A}">
+      <p15:sldGuideLst xmlns:p15="http://schemas.microsoft.com/office/powerpoint/2012/main">
+        <p15:guide id="1" orient="horz" pos="2160" userDrawn="1">
+          <p15:clr>
+            <a:srgbClr val="A4A3A4"/>
+          </p15:clr>
+        </p15:guide>
+        <p15:guide id="2" pos="2880" userDrawn="1">
+          <p15:clr>
+            <a:srgbClr val="A4A3A4"/>
+          </p15:clr>
+        </p15:guide>
+      </p15:sldGuideLst>
+    </p:ext>
+  </p:extLst>
 </p:presentation>
 </file>
 
@@ -299,7 +315,6 @@
           <a:p>
             <a:fld id="{5BCAD085-E8A6-8845-BD4E-CB4CCA059FC4}" type="datetimeFigureOut">
               <a:rPr lang="en-US" smtClean="0"/>
-              <a:t>1/27/13</a:t>
             </a:fld>
             <a:endParaRPr lang="en-US"/>
           </a:p>
@@ -341,18 +356,12 @@
           <a:p>
             <a:fld id="{C1FF6DA9-008F-8B48-92A6-B652298478BF}" type="slidenum">
               <a:rPr lang="en-US" smtClean="0"/>
-              <a:t>‹#›</a:t>
             </a:fld>
             <a:endParaRPr lang="en-US"/>
           </a:p>
         </p:txBody>
       </p:sp>
     </p:spTree>
-    <p:extLst>
-      <p:ext uri="{BB962C8B-B14F-4D97-AF65-F5344CB8AC3E}">
-        <p14:creationId xmlns:p14="http://schemas.microsoft.com/office/powerpoint/2010/main" val="3168075583"/>
-      </p:ext>
-    </p:extLst>
   </p:cSld>
   <p:clrMapOvr>
     <a:masterClrMapping/>
@@ -420,6 +429,7 @@
               <a:rPr lang="en-US" smtClean="0"/>
               <a:t>Click to edit Master text styles</a:t>
             </a:r>
+            <a:endParaRPr lang="en-US" smtClean="0"/>
           </a:p>
           <a:p>
             <a:pPr lvl="1"/>
@@ -427,6 +437,7 @@
               <a:rPr lang="en-US" smtClean="0"/>
               <a:t>Second level</a:t>
             </a:r>
+            <a:endParaRPr lang="en-US" smtClean="0"/>
           </a:p>
           <a:p>
             <a:pPr lvl="2"/>
@@ -434,6 +445,7 @@
               <a:rPr lang="en-US" smtClean="0"/>
               <a:t>Third level</a:t>
             </a:r>
+            <a:endParaRPr lang="en-US" smtClean="0"/>
           </a:p>
           <a:p>
             <a:pPr lvl="3"/>
@@ -441,6 +453,7 @@
               <a:rPr lang="en-US" smtClean="0"/>
               <a:t>Fourth level</a:t>
             </a:r>
+            <a:endParaRPr lang="en-US" smtClean="0"/>
           </a:p>
           <a:p>
             <a:pPr lvl="4"/>
@@ -469,7 +482,6 @@
           <a:p>
             <a:fld id="{5BCAD085-E8A6-8845-BD4E-CB4CCA059FC4}" type="datetimeFigureOut">
               <a:rPr lang="en-US" smtClean="0"/>
-              <a:t>1/27/13</a:t>
             </a:fld>
             <a:endParaRPr lang="en-US"/>
           </a:p>
@@ -511,18 +523,12 @@
           <a:p>
             <a:fld id="{C1FF6DA9-008F-8B48-92A6-B652298478BF}" type="slidenum">
               <a:rPr lang="en-US" smtClean="0"/>
-              <a:t>‹#›</a:t>
             </a:fld>
             <a:endParaRPr lang="en-US"/>
           </a:p>
         </p:txBody>
       </p:sp>
     </p:spTree>
-    <p:extLst>
-      <p:ext uri="{BB962C8B-B14F-4D97-AF65-F5344CB8AC3E}">
-        <p14:creationId xmlns:p14="http://schemas.microsoft.com/office/powerpoint/2010/main" val="2910927964"/>
-      </p:ext>
-    </p:extLst>
   </p:cSld>
   <p:clrMapOvr>
     <a:masterClrMapping/>
@@ -600,6 +606,7 @@
               <a:rPr lang="en-US" smtClean="0"/>
               <a:t>Click to edit Master text styles</a:t>
             </a:r>
+            <a:endParaRPr lang="en-US" smtClean="0"/>
           </a:p>
           <a:p>
             <a:pPr lvl="1"/>
@@ -607,6 +614,7 @@
               <a:rPr lang="en-US" smtClean="0"/>
               <a:t>Second level</a:t>
             </a:r>
+            <a:endParaRPr lang="en-US" smtClean="0"/>
           </a:p>
           <a:p>
             <a:pPr lvl="2"/>
@@ -614,6 +622,7 @@
               <a:rPr lang="en-US" smtClean="0"/>
               <a:t>Third level</a:t>
             </a:r>
+            <a:endParaRPr lang="en-US" smtClean="0"/>
           </a:p>
           <a:p>
             <a:pPr lvl="3"/>
@@ -621,6 +630,7 @@
               <a:rPr lang="en-US" smtClean="0"/>
               <a:t>Fourth level</a:t>
             </a:r>
+            <a:endParaRPr lang="en-US" smtClean="0"/>
           </a:p>
           <a:p>
             <a:pPr lvl="4"/>
@@ -649,7 +659,6 @@
           <a:p>
             <a:fld id="{5BCAD085-E8A6-8845-BD4E-CB4CCA059FC4}" type="datetimeFigureOut">
               <a:rPr lang="en-US" smtClean="0"/>
-              <a:t>1/27/13</a:t>
             </a:fld>
             <a:endParaRPr lang="en-US"/>
           </a:p>
@@ -691,18 +700,12 @@
           <a:p>
             <a:fld id="{C1FF6DA9-008F-8B48-92A6-B652298478BF}" type="slidenum">
               <a:rPr lang="en-US" smtClean="0"/>
-              <a:t>‹#›</a:t>
             </a:fld>
             <a:endParaRPr lang="en-US"/>
           </a:p>
         </p:txBody>
       </p:sp>
     </p:spTree>
-    <p:extLst>
-      <p:ext uri="{BB962C8B-B14F-4D97-AF65-F5344CB8AC3E}">
-        <p14:creationId xmlns:p14="http://schemas.microsoft.com/office/powerpoint/2010/main" val="3612223792"/>
-      </p:ext>
-    </p:extLst>
   </p:cSld>
   <p:clrMapOvr>
     <a:masterClrMapping/>
@@ -770,6 +773,7 @@
               <a:rPr lang="en-US" smtClean="0"/>
               <a:t>Click to edit Master text styles</a:t>
             </a:r>
+            <a:endParaRPr lang="en-US" smtClean="0"/>
           </a:p>
           <a:p>
             <a:pPr lvl="1"/>
@@ -777,6 +781,7 @@
               <a:rPr lang="en-US" smtClean="0"/>
               <a:t>Second level</a:t>
             </a:r>
+            <a:endParaRPr lang="en-US" smtClean="0"/>
           </a:p>
           <a:p>
             <a:pPr lvl="2"/>
@@ -784,6 +789,7 @@
               <a:rPr lang="en-US" smtClean="0"/>
               <a:t>Third level</a:t>
             </a:r>
+            <a:endParaRPr lang="en-US" smtClean="0"/>
           </a:p>
           <a:p>
             <a:pPr lvl="3"/>
@@ -791,6 +797,7 @@
               <a:rPr lang="en-US" smtClean="0"/>
               <a:t>Fourth level</a:t>
             </a:r>
+            <a:endParaRPr lang="en-US" smtClean="0"/>
           </a:p>
           <a:p>
             <a:pPr lvl="4"/>
@@ -819,7 +826,6 @@
           <a:p>
             <a:fld id="{5BCAD085-E8A6-8845-BD4E-CB4CCA059FC4}" type="datetimeFigureOut">
               <a:rPr lang="en-US" smtClean="0"/>
-              <a:t>1/27/13</a:t>
             </a:fld>
             <a:endParaRPr lang="en-US"/>
           </a:p>
@@ -861,18 +867,12 @@
           <a:p>
             <a:fld id="{C1FF6DA9-008F-8B48-92A6-B652298478BF}" type="slidenum">
               <a:rPr lang="en-US" smtClean="0"/>
-              <a:t>‹#›</a:t>
             </a:fld>
             <a:endParaRPr lang="en-US"/>
           </a:p>
         </p:txBody>
       </p:sp>
     </p:spTree>
-    <p:extLst>
-      <p:ext uri="{BB962C8B-B14F-4D97-AF65-F5344CB8AC3E}">
-        <p14:creationId xmlns:p14="http://schemas.microsoft.com/office/powerpoint/2010/main" val="2614314258"/>
-      </p:ext>
-    </p:extLst>
   </p:cSld>
   <p:clrMapOvr>
     <a:masterClrMapping/>
@@ -1045,6 +1045,7 @@
               <a:rPr lang="en-US" smtClean="0"/>
               <a:t>Click to edit Master text styles</a:t>
             </a:r>
+            <a:endParaRPr lang="en-US" smtClean="0"/>
           </a:p>
         </p:txBody>
       </p:sp>
@@ -1065,7 +1066,6 @@
           <a:p>
             <a:fld id="{5BCAD085-E8A6-8845-BD4E-CB4CCA059FC4}" type="datetimeFigureOut">
               <a:rPr lang="en-US" smtClean="0"/>
-              <a:t>1/27/13</a:t>
             </a:fld>
             <a:endParaRPr lang="en-US"/>
           </a:p>
@@ -1107,18 +1107,12 @@
           <a:p>
             <a:fld id="{C1FF6DA9-008F-8B48-92A6-B652298478BF}" type="slidenum">
               <a:rPr lang="en-US" smtClean="0"/>
-              <a:t>‹#›</a:t>
             </a:fld>
             <a:endParaRPr lang="en-US"/>
           </a:p>
         </p:txBody>
       </p:sp>
     </p:spTree>
-    <p:extLst>
-      <p:ext uri="{BB962C8B-B14F-4D97-AF65-F5344CB8AC3E}">
-        <p14:creationId xmlns:p14="http://schemas.microsoft.com/office/powerpoint/2010/main" val="960648375"/>
-      </p:ext>
-    </p:extLst>
   </p:cSld>
   <p:clrMapOvr>
     <a:masterClrMapping/>
@@ -1219,6 +1213,7 @@
               <a:rPr lang="en-US" smtClean="0"/>
               <a:t>Click to edit Master text styles</a:t>
             </a:r>
+            <a:endParaRPr lang="en-US" smtClean="0"/>
           </a:p>
           <a:p>
             <a:pPr lvl="1"/>
@@ -1226,6 +1221,7 @@
               <a:rPr lang="en-US" smtClean="0"/>
               <a:t>Second level</a:t>
             </a:r>
+            <a:endParaRPr lang="en-US" smtClean="0"/>
           </a:p>
           <a:p>
             <a:pPr lvl="2"/>
@@ -1233,6 +1229,7 @@
               <a:rPr lang="en-US" smtClean="0"/>
               <a:t>Third level</a:t>
             </a:r>
+            <a:endParaRPr lang="en-US" smtClean="0"/>
           </a:p>
           <a:p>
             <a:pPr lvl="3"/>
@@ -1240,6 +1237,7 @@
               <a:rPr lang="en-US" smtClean="0"/>
               <a:t>Fourth level</a:t>
             </a:r>
+            <a:endParaRPr lang="en-US" smtClean="0"/>
           </a:p>
           <a:p>
             <a:pPr lvl="4"/>
@@ -1304,6 +1302,7 @@
               <a:rPr lang="en-US" smtClean="0"/>
               <a:t>Click to edit Master text styles</a:t>
             </a:r>
+            <a:endParaRPr lang="en-US" smtClean="0"/>
           </a:p>
           <a:p>
             <a:pPr lvl="1"/>
@@ -1311,6 +1310,7 @@
               <a:rPr lang="en-US" smtClean="0"/>
               <a:t>Second level</a:t>
             </a:r>
+            <a:endParaRPr lang="en-US" smtClean="0"/>
           </a:p>
           <a:p>
             <a:pPr lvl="2"/>
@@ -1318,6 +1318,7 @@
               <a:rPr lang="en-US" smtClean="0"/>
               <a:t>Third level</a:t>
             </a:r>
+            <a:endParaRPr lang="en-US" smtClean="0"/>
           </a:p>
           <a:p>
             <a:pPr lvl="3"/>
@@ -1325,6 +1326,7 @@
               <a:rPr lang="en-US" smtClean="0"/>
               <a:t>Fourth level</a:t>
             </a:r>
+            <a:endParaRPr lang="en-US" smtClean="0"/>
           </a:p>
           <a:p>
             <a:pPr lvl="4"/>
@@ -1353,7 +1355,6 @@
           <a:p>
             <a:fld id="{5BCAD085-E8A6-8845-BD4E-CB4CCA059FC4}" type="datetimeFigureOut">
               <a:rPr lang="en-US" smtClean="0"/>
-              <a:t>1/27/13</a:t>
             </a:fld>
             <a:endParaRPr lang="en-US"/>
           </a:p>
@@ -1395,18 +1396,12 @@
           <a:p>
             <a:fld id="{C1FF6DA9-008F-8B48-92A6-B652298478BF}" type="slidenum">
               <a:rPr lang="en-US" smtClean="0"/>
-              <a:t>‹#›</a:t>
             </a:fld>
             <a:endParaRPr lang="en-US"/>
           </a:p>
         </p:txBody>
       </p:sp>
     </p:spTree>
-    <p:extLst>
-      <p:ext uri="{BB962C8B-B14F-4D97-AF65-F5344CB8AC3E}">
-        <p14:creationId xmlns:p14="http://schemas.microsoft.com/office/powerpoint/2010/main" val="2782244947"/>
-      </p:ext>
-    </p:extLst>
   </p:cSld>
   <p:clrMapOvr>
     <a:masterClrMapping/>
@@ -1520,6 +1515,7 @@
               <a:rPr lang="en-US" smtClean="0"/>
               <a:t>Click to edit Master text styles</a:t>
             </a:r>
+            <a:endParaRPr lang="en-US" smtClean="0"/>
           </a:p>
         </p:txBody>
       </p:sp>
@@ -1576,6 +1572,7 @@
               <a:rPr lang="en-US" smtClean="0"/>
               <a:t>Click to edit Master text styles</a:t>
             </a:r>
+            <a:endParaRPr lang="en-US" smtClean="0"/>
           </a:p>
           <a:p>
             <a:pPr lvl="1"/>
@@ -1583,6 +1580,7 @@
               <a:rPr lang="en-US" smtClean="0"/>
               <a:t>Second level</a:t>
             </a:r>
+            <a:endParaRPr lang="en-US" smtClean="0"/>
           </a:p>
           <a:p>
             <a:pPr lvl="2"/>
@@ -1590,6 +1588,7 @@
               <a:rPr lang="en-US" smtClean="0"/>
               <a:t>Third level</a:t>
             </a:r>
+            <a:endParaRPr lang="en-US" smtClean="0"/>
           </a:p>
           <a:p>
             <a:pPr lvl="3"/>
@@ -1597,6 +1596,7 @@
               <a:rPr lang="en-US" smtClean="0"/>
               <a:t>Fourth level</a:t>
             </a:r>
+            <a:endParaRPr lang="en-US" smtClean="0"/>
           </a:p>
           <a:p>
             <a:pPr lvl="4"/>
@@ -1670,6 +1670,7 @@
               <a:rPr lang="en-US" smtClean="0"/>
               <a:t>Click to edit Master text styles</a:t>
             </a:r>
+            <a:endParaRPr lang="en-US" smtClean="0"/>
           </a:p>
         </p:txBody>
       </p:sp>
@@ -1726,6 +1727,7 @@
               <a:rPr lang="en-US" smtClean="0"/>
               <a:t>Click to edit Master text styles</a:t>
             </a:r>
+            <a:endParaRPr lang="en-US" smtClean="0"/>
           </a:p>
           <a:p>
             <a:pPr lvl="1"/>
@@ -1733,6 +1735,7 @@
               <a:rPr lang="en-US" smtClean="0"/>
               <a:t>Second level</a:t>
             </a:r>
+            <a:endParaRPr lang="en-US" smtClean="0"/>
           </a:p>
           <a:p>
             <a:pPr lvl="2"/>
@@ -1740,6 +1743,7 @@
               <a:rPr lang="en-US" smtClean="0"/>
               <a:t>Third level</a:t>
             </a:r>
+            <a:endParaRPr lang="en-US" smtClean="0"/>
           </a:p>
           <a:p>
             <a:pPr lvl="3"/>
@@ -1747,6 +1751,7 @@
               <a:rPr lang="en-US" smtClean="0"/>
               <a:t>Fourth level</a:t>
             </a:r>
+            <a:endParaRPr lang="en-US" smtClean="0"/>
           </a:p>
           <a:p>
             <a:pPr lvl="4"/>
@@ -1775,7 +1780,6 @@
           <a:p>
             <a:fld id="{5BCAD085-E8A6-8845-BD4E-CB4CCA059FC4}" type="datetimeFigureOut">
               <a:rPr lang="en-US" smtClean="0"/>
-              <a:t>1/27/13</a:t>
             </a:fld>
             <a:endParaRPr lang="en-US"/>
           </a:p>
@@ -1817,18 +1821,12 @@
           <a:p>
             <a:fld id="{C1FF6DA9-008F-8B48-92A6-B652298478BF}" type="slidenum">
               <a:rPr lang="en-US" smtClean="0"/>
-              <a:t>‹#›</a:t>
             </a:fld>
             <a:endParaRPr lang="en-US"/>
           </a:p>
         </p:txBody>
       </p:sp>
     </p:spTree>
-    <p:extLst>
-      <p:ext uri="{BB962C8B-B14F-4D97-AF65-F5344CB8AC3E}">
-        <p14:creationId xmlns:p14="http://schemas.microsoft.com/office/powerpoint/2010/main" val="990158736"/>
-      </p:ext>
-    </p:extLst>
   </p:cSld>
   <p:clrMapOvr>
     <a:masterClrMapping/>
@@ -1893,7 +1891,6 @@
           <a:p>
             <a:fld id="{5BCAD085-E8A6-8845-BD4E-CB4CCA059FC4}" type="datetimeFigureOut">
               <a:rPr lang="en-US" smtClean="0"/>
-              <a:t>1/27/13</a:t>
             </a:fld>
             <a:endParaRPr lang="en-US"/>
           </a:p>
@@ -1935,18 +1932,12 @@
           <a:p>
             <a:fld id="{C1FF6DA9-008F-8B48-92A6-B652298478BF}" type="slidenum">
               <a:rPr lang="en-US" smtClean="0"/>
-              <a:t>‹#›</a:t>
             </a:fld>
             <a:endParaRPr lang="en-US"/>
           </a:p>
         </p:txBody>
       </p:sp>
     </p:spTree>
-    <p:extLst>
-      <p:ext uri="{BB962C8B-B14F-4D97-AF65-F5344CB8AC3E}">
-        <p14:creationId xmlns:p14="http://schemas.microsoft.com/office/powerpoint/2010/main" val="727027711"/>
-      </p:ext>
-    </p:extLst>
   </p:cSld>
   <p:clrMapOvr>
     <a:masterClrMapping/>
@@ -1988,7 +1979,6 @@
           <a:p>
             <a:fld id="{5BCAD085-E8A6-8845-BD4E-CB4CCA059FC4}" type="datetimeFigureOut">
               <a:rPr lang="en-US" smtClean="0"/>
-              <a:t>1/27/13</a:t>
             </a:fld>
             <a:endParaRPr lang="en-US"/>
           </a:p>
@@ -2030,18 +2020,12 @@
           <a:p>
             <a:fld id="{C1FF6DA9-008F-8B48-92A6-B652298478BF}" type="slidenum">
               <a:rPr lang="en-US" smtClean="0"/>
-              <a:t>‹#›</a:t>
             </a:fld>
             <a:endParaRPr lang="en-US"/>
           </a:p>
         </p:txBody>
       </p:sp>
     </p:spTree>
-    <p:extLst>
-      <p:ext uri="{BB962C8B-B14F-4D97-AF65-F5344CB8AC3E}">
-        <p14:creationId xmlns:p14="http://schemas.microsoft.com/office/powerpoint/2010/main" val="1212999818"/>
-      </p:ext>
-    </p:extLst>
   </p:cSld>
   <p:clrMapOvr>
     <a:masterClrMapping/>
@@ -2151,6 +2135,7 @@
               <a:rPr lang="en-US" smtClean="0"/>
               <a:t>Click to edit Master text styles</a:t>
             </a:r>
+            <a:endParaRPr lang="en-US" smtClean="0"/>
           </a:p>
           <a:p>
             <a:pPr lvl="1"/>
@@ -2158,6 +2143,7 @@
               <a:rPr lang="en-US" smtClean="0"/>
               <a:t>Second level</a:t>
             </a:r>
+            <a:endParaRPr lang="en-US" smtClean="0"/>
           </a:p>
           <a:p>
             <a:pPr lvl="2"/>
@@ -2165,6 +2151,7 @@
               <a:rPr lang="en-US" smtClean="0"/>
               <a:t>Third level</a:t>
             </a:r>
+            <a:endParaRPr lang="en-US" smtClean="0"/>
           </a:p>
           <a:p>
             <a:pPr lvl="3"/>
@@ -2172,6 +2159,7 @@
               <a:rPr lang="en-US" smtClean="0"/>
               <a:t>Fourth level</a:t>
             </a:r>
+            <a:endParaRPr lang="en-US" smtClean="0"/>
           </a:p>
           <a:p>
             <a:pPr lvl="4"/>
@@ -2245,6 +2233,7 @@
               <a:rPr lang="en-US" smtClean="0"/>
               <a:t>Click to edit Master text styles</a:t>
             </a:r>
+            <a:endParaRPr lang="en-US" smtClean="0"/>
           </a:p>
         </p:txBody>
       </p:sp>
@@ -2265,7 +2254,6 @@
           <a:p>
             <a:fld id="{5BCAD085-E8A6-8845-BD4E-CB4CCA059FC4}" type="datetimeFigureOut">
               <a:rPr lang="en-US" smtClean="0"/>
-              <a:t>1/27/13</a:t>
             </a:fld>
             <a:endParaRPr lang="en-US"/>
           </a:p>
@@ -2307,18 +2295,12 @@
           <a:p>
             <a:fld id="{C1FF6DA9-008F-8B48-92A6-B652298478BF}" type="slidenum">
               <a:rPr lang="en-US" smtClean="0"/>
-              <a:t>‹#›</a:t>
             </a:fld>
             <a:endParaRPr lang="en-US"/>
           </a:p>
         </p:txBody>
       </p:sp>
     </p:spTree>
-    <p:extLst>
-      <p:ext uri="{BB962C8B-B14F-4D97-AF65-F5344CB8AC3E}">
-        <p14:creationId xmlns:p14="http://schemas.microsoft.com/office/powerpoint/2010/main" val="1840726560"/>
-      </p:ext>
-    </p:extLst>
   </p:cSld>
   <p:clrMapOvr>
     <a:masterClrMapping/>
@@ -2498,6 +2480,7 @@
               <a:rPr lang="en-US" smtClean="0"/>
               <a:t>Click to edit Master text styles</a:t>
             </a:r>
+            <a:endParaRPr lang="en-US" smtClean="0"/>
           </a:p>
         </p:txBody>
       </p:sp>
@@ -2518,7 +2501,6 @@
           <a:p>
             <a:fld id="{5BCAD085-E8A6-8845-BD4E-CB4CCA059FC4}" type="datetimeFigureOut">
               <a:rPr lang="en-US" smtClean="0"/>
-              <a:t>1/27/13</a:t>
             </a:fld>
             <a:endParaRPr lang="en-US"/>
           </a:p>
@@ -2560,18 +2542,12 @@
           <a:p>
             <a:fld id="{C1FF6DA9-008F-8B48-92A6-B652298478BF}" type="slidenum">
               <a:rPr lang="en-US" smtClean="0"/>
-              <a:t>‹#›</a:t>
             </a:fld>
             <a:endParaRPr lang="en-US"/>
           </a:p>
         </p:txBody>
       </p:sp>
     </p:spTree>
-    <p:extLst>
-      <p:ext uri="{BB962C8B-B14F-4D97-AF65-F5344CB8AC3E}">
-        <p14:creationId xmlns:p14="http://schemas.microsoft.com/office/powerpoint/2010/main" val="3889236939"/>
-      </p:ext>
-    </p:extLst>
   </p:cSld>
   <p:clrMapOvr>
     <a:masterClrMapping/>
@@ -2664,6 +2640,7 @@
               <a:rPr lang="en-US" smtClean="0"/>
               <a:t>Click to edit Master text styles</a:t>
             </a:r>
+            <a:endParaRPr lang="en-US" smtClean="0"/>
           </a:p>
           <a:p>
             <a:pPr lvl="1"/>
@@ -2671,6 +2648,7 @@
               <a:rPr lang="en-US" smtClean="0"/>
               <a:t>Second level</a:t>
             </a:r>
+            <a:endParaRPr lang="en-US" smtClean="0"/>
           </a:p>
           <a:p>
             <a:pPr lvl="2"/>
@@ -2678,6 +2656,7 @@
               <a:rPr lang="en-US" smtClean="0"/>
               <a:t>Third level</a:t>
             </a:r>
+            <a:endParaRPr lang="en-US" smtClean="0"/>
           </a:p>
           <a:p>
             <a:pPr lvl="3"/>
@@ -2685,6 +2664,7 @@
               <a:rPr lang="en-US" smtClean="0"/>
               <a:t>Fourth level</a:t>
             </a:r>
+            <a:endParaRPr lang="en-US" smtClean="0"/>
           </a:p>
           <a:p>
             <a:pPr lvl="4"/>
@@ -2731,7 +2711,6 @@
           <a:p>
             <a:fld id="{5BCAD085-E8A6-8845-BD4E-CB4CCA059FC4}" type="datetimeFigureOut">
               <a:rPr lang="en-US" smtClean="0"/>
-              <a:t>1/27/13</a:t>
             </a:fld>
             <a:endParaRPr lang="en-US"/>
           </a:p>
@@ -2809,18 +2788,12 @@
           <a:p>
             <a:fld id="{C1FF6DA9-008F-8B48-92A6-B652298478BF}" type="slidenum">
               <a:rPr lang="en-US" smtClean="0"/>
-              <a:t>‹#›</a:t>
             </a:fld>
             <a:endParaRPr lang="en-US"/>
           </a:p>
         </p:txBody>
       </p:sp>
     </p:spTree>
-    <p:extLst>
-      <p:ext uri="{BB962C8B-B14F-4D97-AF65-F5344CB8AC3E}">
-        <p14:creationId xmlns:p14="http://schemas.microsoft.com/office/powerpoint/2010/main" val="2209977519"/>
-      </p:ext>
-    </p:extLst>
   </p:cSld>
   <p:clrMap bg1="lt1" tx1="dk1" bg2="lt2" tx2="dk2" accent1="accent1" accent2="accent2" accent3="accent3" accent4="accent4" accent5="accent5" accent6="accent6" hlink="hlink" folHlink="folHlink"/>
   <p:sldLayoutIdLst>
@@ -2858,7 +2831,7 @@
         <a:spcBef>
           <a:spcPct val="20000"/>
         </a:spcBef>
-        <a:buFont typeface="Arial"/>
+        <a:buFont typeface="Arial" panose="020B0604020202020204"/>
         <a:buChar char="•"/>
         <a:defRPr sz="3200" kern="1200">
           <a:solidFill>
@@ -2873,7 +2846,7 @@
         <a:spcBef>
           <a:spcPct val="20000"/>
         </a:spcBef>
-        <a:buFont typeface="Arial"/>
+        <a:buFont typeface="Arial" panose="020B0604020202020204"/>
         <a:buChar char="–"/>
         <a:defRPr sz="2800" kern="1200">
           <a:solidFill>
@@ -2888,7 +2861,7 @@
         <a:spcBef>
           <a:spcPct val="20000"/>
         </a:spcBef>
-        <a:buFont typeface="Arial"/>
+        <a:buFont typeface="Arial" panose="020B0604020202020204"/>
         <a:buChar char="•"/>
         <a:defRPr sz="2400" kern="1200">
           <a:solidFill>
@@ -2903,7 +2876,7 @@
         <a:spcBef>
           <a:spcPct val="20000"/>
         </a:spcBef>
-        <a:buFont typeface="Arial"/>
+        <a:buFont typeface="Arial" panose="020B0604020202020204"/>
         <a:buChar char="–"/>
         <a:defRPr sz="2000" kern="1200">
           <a:solidFill>
@@ -2918,7 +2891,7 @@
         <a:spcBef>
           <a:spcPct val="20000"/>
         </a:spcBef>
-        <a:buFont typeface="Arial"/>
+        <a:buFont typeface="Arial" panose="020B0604020202020204"/>
         <a:buChar char="»"/>
         <a:defRPr sz="2000" kern="1200">
           <a:solidFill>
@@ -2933,7 +2906,7 @@
         <a:spcBef>
           <a:spcPct val="20000"/>
         </a:spcBef>
-        <a:buFont typeface="Arial"/>
+        <a:buFont typeface="Arial" panose="020B0604020202020204"/>
         <a:buChar char="•"/>
         <a:defRPr sz="2000" kern="1200">
           <a:solidFill>
@@ -2948,7 +2921,7 @@
         <a:spcBef>
           <a:spcPct val="20000"/>
         </a:spcBef>
-        <a:buFont typeface="Arial"/>
+        <a:buFont typeface="Arial" panose="020B0604020202020204"/>
         <a:buChar char="•"/>
         <a:defRPr sz="2000" kern="1200">
           <a:solidFill>
@@ -2963,7 +2936,7 @@
         <a:spcBef>
           <a:spcPct val="20000"/>
         </a:spcBef>
-        <a:buFont typeface="Arial"/>
+        <a:buFont typeface="Arial" panose="020B0604020202020204"/>
         <a:buChar char="•"/>
         <a:defRPr sz="2000" kern="1200">
           <a:solidFill>
@@ -2978,7 +2951,7 @@
         <a:spcBef>
           <a:spcPct val="20000"/>
         </a:spcBef>
-        <a:buFont typeface="Arial"/>
+        <a:buFont typeface="Arial" panose="020B0604020202020204"/>
         <a:buChar char="•"/>
         <a:defRPr sz="2000" kern="1200">
           <a:solidFill>
@@ -3090,7 +3063,7 @@
 </file>
 
 <file path=ppt/slides/slide1.xml><?xml version="1.0" encoding="utf-8"?>
-<p:sld xmlns:a="http://schemas.openxmlformats.org/drawingml/2006/main" xmlns:p="http://schemas.openxmlformats.org/presentationml/2006/main" xmlns:r="http://schemas.openxmlformats.org/officeDocument/2006/relationships">
+<p:sld xmlns:a="http://schemas.openxmlformats.org/drawingml/2006/main" xmlns:r="http://schemas.openxmlformats.org/officeDocument/2006/relationships" xmlns:p="http://schemas.openxmlformats.org/presentationml/2006/main">
   <p:cSld>
     <p:bg>
       <p:bgPr>
@@ -3167,7 +3140,7 @@
           <a:noFill/>
         </p:spPr>
         <p:txBody>
-          <a:bodyPr wrap="square" lIns="0" rIns="0" tIns="0" bIns="0" anchor="ctr">
+          <a:bodyPr wrap="square" lIns="0" tIns="0" rIns="0" bIns="0" anchor="ctr">
             <a:spAutoFit/>
           </a:bodyPr>
           <a:lstStyle/>
@@ -3182,10 +3155,16 @@
                 <a:solidFill>
                   <a:srgbClr val="0F2233"/>
                 </a:solidFill>
-                <a:latin typeface="Microsoft YaHei"/>
+                <a:latin typeface="微软雅黑" panose="020B0503020204020204" charset="-122"/>
               </a:rPr>
               <a:t>平台演示稿</a:t>
             </a:r>
+            <a:endParaRPr sz="1050" b="1">
+              <a:solidFill>
+                <a:srgbClr val="0F2233"/>
+              </a:solidFill>
+              <a:latin typeface="微软雅黑" panose="020B0503020204020204" charset="-122"/>
+            </a:endParaRPr>
           </a:p>
         </p:txBody>
       </p:sp>
@@ -3206,7 +3185,7 @@
           <a:noFill/>
         </p:spPr>
         <p:txBody>
-          <a:bodyPr wrap="square" lIns="0" rIns="0" tIns="0" bIns="0" anchor="t">
+          <a:bodyPr wrap="square" lIns="0" tIns="0" rIns="0" bIns="0" anchor="t">
             <a:spAutoFit/>
           </a:bodyPr>
           <a:lstStyle/>
@@ -3221,10 +3200,16 @@
                 <a:solidFill>
                   <a:srgbClr val="FFFFFF"/>
                 </a:solidFill>
-                <a:latin typeface="Microsoft YaHei"/>
+                <a:latin typeface="微软雅黑" panose="020B0503020204020204" charset="-122"/>
               </a:rPr>
               <a:t>VoiceInput Pro</a:t>
             </a:r>
+            <a:endParaRPr sz="2800" b="1">
+              <a:solidFill>
+                <a:srgbClr val="FFFFFF"/>
+              </a:solidFill>
+              <a:latin typeface="微软雅黑" panose="020B0503020204020204" charset="-122"/>
+            </a:endParaRPr>
           </a:p>
         </p:txBody>
       </p:sp>
@@ -3245,7 +3230,7 @@
           <a:noFill/>
         </p:spPr>
         <p:txBody>
-          <a:bodyPr wrap="square" lIns="0" rIns="0" tIns="0" bIns="0" anchor="t">
+          <a:bodyPr wrap="square" lIns="0" tIns="0" rIns="0" bIns="0" anchor="t">
             <a:spAutoFit/>
           </a:bodyPr>
           <a:lstStyle/>
@@ -3260,11 +3245,17 @@
                 <a:solidFill>
                   <a:srgbClr val="FFFFFF"/>
                 </a:solidFill>
-                <a:latin typeface="Microsoft YaHei"/>
+                <a:latin typeface="微软雅黑" panose="020B0503020204020204" charset="-122"/>
               </a:rPr>
               <a:t>一套面向办公与技术场景的智能语音输入工作台
 从音频上传、识别优化，到历史沉淀、导出交付，页面与数据链路完整打通。</a:t>
             </a:r>
+            <a:endParaRPr sz="1800" b="0">
+              <a:solidFill>
+                <a:srgbClr val="FFFFFF"/>
+              </a:solidFill>
+              <a:latin typeface="微软雅黑" panose="020B0503020204020204" charset="-122"/>
+            </a:endParaRPr>
           </a:p>
         </p:txBody>
       </p:sp>
@@ -3285,7 +3276,7 @@
           <a:noFill/>
         </p:spPr>
         <p:txBody>
-          <a:bodyPr wrap="square" lIns="0" rIns="0" tIns="0" bIns="0" anchor="t">
+          <a:bodyPr wrap="square" lIns="0" tIns="0" rIns="0" bIns="0" anchor="t">
             <a:spAutoFit/>
           </a:bodyPr>
           <a:lstStyle/>
@@ -3300,10 +3291,16 @@
                 <a:solidFill>
                   <a:srgbClr val="CED8E2"/>
                 </a:solidFill>
-                <a:latin typeface="Microsoft YaHei"/>
+                <a:latin typeface="微软雅黑" panose="020B0503020204020204" charset="-122"/>
               </a:rPr>
               <a:t>适合课堂答辩、项目验收、功能演示</a:t>
             </a:r>
+            <a:endParaRPr sz="1150" b="0">
+              <a:solidFill>
+                <a:srgbClr val="CED8E2"/>
+              </a:solidFill>
+              <a:latin typeface="微软雅黑" panose="020B0503020204020204" charset="-122"/>
+            </a:endParaRPr>
           </a:p>
         </p:txBody>
       </p:sp>
@@ -3361,7 +3358,7 @@
           <p:nvPr/>
         </p:nvPicPr>
         <p:blipFill>
-          <a:blip r:embed="rId2"/>
+          <a:blip r:embed="rId1"/>
           <a:stretch>
             <a:fillRect/>
           </a:stretch>
@@ -3393,7 +3390,7 @@
           <a:noFill/>
         </p:spPr>
         <p:txBody>
-          <a:bodyPr wrap="square" lIns="0" rIns="0" tIns="0" bIns="0" anchor="ctr">
+          <a:bodyPr wrap="square" lIns="0" tIns="0" rIns="0" bIns="0" anchor="ctr">
             <a:spAutoFit/>
           </a:bodyPr>
           <a:lstStyle/>
@@ -3408,10 +3405,16 @@
                 <a:solidFill>
                   <a:srgbClr val="5B6B7A"/>
                 </a:solidFill>
-                <a:latin typeface="Microsoft YaHei"/>
+                <a:latin typeface="微软雅黑" panose="020B0503020204020204" charset="-122"/>
               </a:rPr>
               <a:t>工作台首页实拍</a:t>
             </a:r>
+            <a:endParaRPr sz="1050" b="0">
+              <a:solidFill>
+                <a:srgbClr val="5B6B7A"/>
+              </a:solidFill>
+              <a:latin typeface="微软雅黑" panose="020B0503020204020204" charset="-122"/>
+            </a:endParaRPr>
           </a:p>
         </p:txBody>
       </p:sp>
@@ -3424,7 +3427,7 @@
 </file>
 
 <file path=ppt/slides/slide10.xml><?xml version="1.0" encoding="utf-8"?>
-<p:sld xmlns:a="http://schemas.openxmlformats.org/drawingml/2006/main" xmlns:p="http://schemas.openxmlformats.org/presentationml/2006/main" xmlns:r="http://schemas.openxmlformats.org/officeDocument/2006/relationships">
+<p:sld xmlns:a="http://schemas.openxmlformats.org/drawingml/2006/main" xmlns:r="http://schemas.openxmlformats.org/officeDocument/2006/relationships" xmlns:p="http://schemas.openxmlformats.org/presentationml/2006/main">
   <p:cSld>
     <p:bg>
       <p:bgPr>
@@ -3458,7 +3461,7 @@
           <a:noFill/>
         </p:spPr>
         <p:txBody>
-          <a:bodyPr wrap="square" lIns="0" rIns="0" tIns="0" bIns="0" anchor="t">
+          <a:bodyPr wrap="square" lIns="0" tIns="0" rIns="0" bIns="0" anchor="t">
             <a:spAutoFit/>
           </a:bodyPr>
           <a:lstStyle/>
@@ -3473,10 +3476,16 @@
                 <a:solidFill>
                   <a:srgbClr val="183B5B"/>
                 </a:solidFill>
-                <a:latin typeface="Microsoft YaHei"/>
+                <a:latin typeface="微软雅黑" panose="020B0503020204020204" charset="-122"/>
               </a:rPr>
               <a:t>为什么这套平台适合拿来验收</a:t>
             </a:r>
+            <a:endParaRPr sz="2800" b="1">
+              <a:solidFill>
+                <a:srgbClr val="183B5B"/>
+              </a:solidFill>
+              <a:latin typeface="微软雅黑" panose="020B0503020204020204" charset="-122"/>
+            </a:endParaRPr>
           </a:p>
         </p:txBody>
       </p:sp>
@@ -3497,7 +3506,7 @@
           <a:noFill/>
         </p:spPr>
         <p:txBody>
-          <a:bodyPr wrap="square" lIns="0" rIns="0" tIns="0" bIns="0" anchor="t">
+          <a:bodyPr wrap="square" lIns="0" tIns="0" rIns="0" bIns="0" anchor="t">
             <a:spAutoFit/>
           </a:bodyPr>
           <a:lstStyle/>
@@ -3512,10 +3521,16 @@
                 <a:solidFill>
                   <a:srgbClr val="5B6B7A"/>
                 </a:solidFill>
-                <a:latin typeface="Microsoft YaHei"/>
+                <a:latin typeface="微软雅黑" panose="020B0503020204020204" charset="-122"/>
               </a:rPr>
               <a:t>评审最关心的通常不是“页面多不多”，而是“功能是不是真的跑得通”。</a:t>
             </a:r>
+            <a:endParaRPr sz="1150" b="0">
+              <a:solidFill>
+                <a:srgbClr val="5B6B7A"/>
+              </a:solidFill>
+              <a:latin typeface="微软雅黑" panose="020B0503020204020204" charset="-122"/>
+            </a:endParaRPr>
           </a:p>
         </p:txBody>
       </p:sp>
@@ -3667,7 +3682,7 @@
           <a:noFill/>
         </p:spPr>
         <p:txBody>
-          <a:bodyPr wrap="square" lIns="0" rIns="0" tIns="0" bIns="0" anchor="t">
+          <a:bodyPr wrap="square" lIns="0" tIns="0" rIns="0" bIns="0" anchor="t">
             <a:spAutoFit/>
           </a:bodyPr>
           <a:lstStyle/>
@@ -3682,10 +3697,16 @@
                 <a:solidFill>
                   <a:srgbClr val="183B5B"/>
                 </a:solidFill>
-                <a:latin typeface="Microsoft YaHei"/>
+                <a:latin typeface="微软雅黑" panose="020B0503020204020204" charset="-122"/>
               </a:rPr>
               <a:t>入口真实可用</a:t>
             </a:r>
+            <a:endParaRPr sz="1550" b="1">
+              <a:solidFill>
+                <a:srgbClr val="183B5B"/>
+              </a:solidFill>
+              <a:latin typeface="微软雅黑" panose="020B0503020204020204" charset="-122"/>
+            </a:endParaRPr>
           </a:p>
         </p:txBody>
       </p:sp>
@@ -3706,7 +3727,7 @@
           <a:noFill/>
         </p:spPr>
         <p:txBody>
-          <a:bodyPr wrap="square" lIns="0" rIns="0" tIns="0" bIns="0" anchor="t">
+          <a:bodyPr wrap="square" lIns="0" tIns="0" rIns="0" bIns="0" anchor="t">
             <a:spAutoFit/>
           </a:bodyPr>
           <a:lstStyle/>
@@ -3721,10 +3742,16 @@
                 <a:solidFill>
                   <a:srgbClr val="5B6B7A"/>
                 </a:solidFill>
-                <a:latin typeface="Microsoft YaHei"/>
+                <a:latin typeface="微软雅黑" panose="020B0503020204020204" charset="-122"/>
               </a:rPr>
               <a:t>上传、处理、保存历史、导出、热词维护、配置保存和统计查看，都对应实际行为。</a:t>
             </a:r>
+            <a:endParaRPr sz="1250" b="0">
+              <a:solidFill>
+                <a:srgbClr val="5B6B7A"/>
+              </a:solidFill>
+              <a:latin typeface="微软雅黑" panose="020B0503020204020204" charset="-122"/>
+            </a:endParaRPr>
           </a:p>
         </p:txBody>
       </p:sp>
@@ -3833,7 +3860,7 @@
           <a:noFill/>
         </p:spPr>
         <p:txBody>
-          <a:bodyPr wrap="square" lIns="0" rIns="0" tIns="0" bIns="0" anchor="t">
+          <a:bodyPr wrap="square" lIns="0" tIns="0" rIns="0" bIns="0" anchor="t">
             <a:spAutoFit/>
           </a:bodyPr>
           <a:lstStyle/>
@@ -3848,10 +3875,16 @@
                 <a:solidFill>
                   <a:srgbClr val="183B5B"/>
                 </a:solidFill>
-                <a:latin typeface="Microsoft YaHei"/>
+                <a:latin typeface="微软雅黑" panose="020B0503020204020204" charset="-122"/>
               </a:rPr>
               <a:t>数据链路完整</a:t>
             </a:r>
+            <a:endParaRPr sz="1550" b="1">
+              <a:solidFill>
+                <a:srgbClr val="183B5B"/>
+              </a:solidFill>
+              <a:latin typeface="微软雅黑" panose="020B0503020204020204" charset="-122"/>
+            </a:endParaRPr>
           </a:p>
         </p:txBody>
       </p:sp>
@@ -3872,7 +3905,7 @@
           <a:noFill/>
         </p:spPr>
         <p:txBody>
-          <a:bodyPr wrap="square" lIns="0" rIns="0" tIns="0" bIns="0" anchor="t">
+          <a:bodyPr wrap="square" lIns="0" tIns="0" rIns="0" bIns="0" anchor="t">
             <a:spAutoFit/>
           </a:bodyPr>
           <a:lstStyle/>
@@ -3887,10 +3920,16 @@
                 <a:solidFill>
                   <a:srgbClr val="5B6B7A"/>
                 </a:solidFill>
-                <a:latin typeface="Microsoft YaHei"/>
+                <a:latin typeface="微软雅黑" panose="020B0503020204020204" charset="-122"/>
               </a:rPr>
               <a:t>任务结果不是页面假数据，而是能够回到历史、导出中心和统计页继续使用。</a:t>
             </a:r>
+            <a:endParaRPr sz="1250" b="0">
+              <a:solidFill>
+                <a:srgbClr val="5B6B7A"/>
+              </a:solidFill>
+              <a:latin typeface="微软雅黑" panose="020B0503020204020204" charset="-122"/>
+            </a:endParaRPr>
           </a:p>
         </p:txBody>
       </p:sp>
@@ -3999,7 +4038,7 @@
           <a:noFill/>
         </p:spPr>
         <p:txBody>
-          <a:bodyPr wrap="square" lIns="0" rIns="0" tIns="0" bIns="0" anchor="t">
+          <a:bodyPr wrap="square" lIns="0" tIns="0" rIns="0" bIns="0" anchor="t">
             <a:spAutoFit/>
           </a:bodyPr>
           <a:lstStyle/>
@@ -4014,10 +4053,16 @@
                 <a:solidFill>
                   <a:srgbClr val="183B5B"/>
                 </a:solidFill>
-                <a:latin typeface="Microsoft YaHei"/>
+                <a:latin typeface="微软雅黑" panose="020B0503020204020204" charset="-122"/>
               </a:rPr>
               <a:t>场景化差异明确</a:t>
             </a:r>
+            <a:endParaRPr sz="1550" b="1">
+              <a:solidFill>
+                <a:srgbClr val="183B5B"/>
+              </a:solidFill>
+              <a:latin typeface="微软雅黑" panose="020B0503020204020204" charset="-122"/>
+            </a:endParaRPr>
           </a:p>
         </p:txBody>
       </p:sp>
@@ -4038,7 +4083,7 @@
           <a:noFill/>
         </p:spPr>
         <p:txBody>
-          <a:bodyPr wrap="square" lIns="0" rIns="0" tIns="0" bIns="0" anchor="t">
+          <a:bodyPr wrap="square" lIns="0" tIns="0" rIns="0" bIns="0" anchor="t">
             <a:spAutoFit/>
           </a:bodyPr>
           <a:lstStyle/>
@@ -4053,10 +4098,16 @@
                 <a:solidFill>
                   <a:srgbClr val="5B6B7A"/>
                 </a:solidFill>
-                <a:latin typeface="Microsoft YaHei"/>
+                <a:latin typeface="微软雅黑" panose="020B0503020204020204" charset="-122"/>
               </a:rPr>
               <a:t>六类输入场景让结果不是一刀切输出，更容易展示产品设计思路。</a:t>
             </a:r>
+            <a:endParaRPr sz="1250" b="0">
+              <a:solidFill>
+                <a:srgbClr val="5B6B7A"/>
+              </a:solidFill>
+              <a:latin typeface="微软雅黑" panose="020B0503020204020204" charset="-122"/>
+            </a:endParaRPr>
           </a:p>
         </p:txBody>
       </p:sp>
@@ -4165,7 +4216,7 @@
           <a:noFill/>
         </p:spPr>
         <p:txBody>
-          <a:bodyPr wrap="square" lIns="0" rIns="0" tIns="0" bIns="0" anchor="t">
+          <a:bodyPr wrap="square" lIns="0" tIns="0" rIns="0" bIns="0" anchor="t">
             <a:spAutoFit/>
           </a:bodyPr>
           <a:lstStyle/>
@@ -4180,10 +4231,16 @@
                 <a:solidFill>
                   <a:srgbClr val="183B5B"/>
                 </a:solidFill>
-                <a:latin typeface="Microsoft YaHei"/>
+                <a:latin typeface="微软雅黑" panose="020B0503020204020204" charset="-122"/>
               </a:rPr>
               <a:t>便于现场演示</a:t>
             </a:r>
+            <a:endParaRPr sz="1550" b="1">
+              <a:solidFill>
+                <a:srgbClr val="183B5B"/>
+              </a:solidFill>
+              <a:latin typeface="微软雅黑" panose="020B0503020204020204" charset="-122"/>
+            </a:endParaRPr>
           </a:p>
         </p:txBody>
       </p:sp>
@@ -4204,7 +4261,7 @@
           <a:noFill/>
         </p:spPr>
         <p:txBody>
-          <a:bodyPr wrap="square" lIns="0" rIns="0" tIns="0" bIns="0" anchor="t">
+          <a:bodyPr wrap="square" lIns="0" tIns="0" rIns="0" bIns="0" anchor="t">
             <a:spAutoFit/>
           </a:bodyPr>
           <a:lstStyle/>
@@ -4219,10 +4276,16 @@
                 <a:solidFill>
                   <a:srgbClr val="5B6B7A"/>
                 </a:solidFill>
-                <a:latin typeface="Microsoft YaHei"/>
+                <a:latin typeface="微软雅黑" panose="020B0503020204020204" charset="-122"/>
               </a:rPr>
               <a:t>从工作台开始，一步步能走到历史、热词、配置和导出，流程清晰，讲起来也顺。</a:t>
             </a:r>
+            <a:endParaRPr sz="1250" b="0">
+              <a:solidFill>
+                <a:srgbClr val="5B6B7A"/>
+              </a:solidFill>
+              <a:latin typeface="微软雅黑" panose="020B0503020204020204" charset="-122"/>
+            </a:endParaRPr>
           </a:p>
         </p:txBody>
       </p:sp>
@@ -4235,7 +4298,7 @@
 </file>
 
 <file path=ppt/slides/slide11.xml><?xml version="1.0" encoding="utf-8"?>
-<p:sld xmlns:a="http://schemas.openxmlformats.org/drawingml/2006/main" xmlns:p="http://schemas.openxmlformats.org/presentationml/2006/main" xmlns:r="http://schemas.openxmlformats.org/officeDocument/2006/relationships">
+<p:sld xmlns:a="http://schemas.openxmlformats.org/drawingml/2006/main" xmlns:r="http://schemas.openxmlformats.org/officeDocument/2006/relationships" xmlns:p="http://schemas.openxmlformats.org/presentationml/2006/main">
   <p:cSld>
     <p:bg>
       <p:bgPr>
@@ -4269,7 +4332,7 @@
           <a:noFill/>
         </p:spPr>
         <p:txBody>
-          <a:bodyPr wrap="square" lIns="0" rIns="0" tIns="0" bIns="0" anchor="t">
+          <a:bodyPr wrap="square" lIns="0" tIns="0" rIns="0" bIns="0" anchor="t">
             <a:spAutoFit/>
           </a:bodyPr>
           <a:lstStyle/>
@@ -4284,10 +4347,16 @@
                 <a:solidFill>
                   <a:srgbClr val="183B5B"/>
                 </a:solidFill>
-                <a:latin typeface="Microsoft YaHei"/>
+                <a:latin typeface="微软雅黑" panose="020B0503020204020204" charset="-122"/>
               </a:rPr>
               <a:t>建议的现场演示路径</a:t>
             </a:r>
+            <a:endParaRPr sz="2800" b="1">
+              <a:solidFill>
+                <a:srgbClr val="183B5B"/>
+              </a:solidFill>
+              <a:latin typeface="微软雅黑" panose="020B0503020204020204" charset="-122"/>
+            </a:endParaRPr>
           </a:p>
         </p:txBody>
       </p:sp>
@@ -4308,7 +4377,7 @@
           <a:noFill/>
         </p:spPr>
         <p:txBody>
-          <a:bodyPr wrap="square" lIns="0" rIns="0" tIns="0" bIns="0" anchor="t">
+          <a:bodyPr wrap="square" lIns="0" tIns="0" rIns="0" bIns="0" anchor="t">
             <a:spAutoFit/>
           </a:bodyPr>
           <a:lstStyle/>
@@ -4323,10 +4392,16 @@
                 <a:solidFill>
                   <a:srgbClr val="5B6B7A"/>
                 </a:solidFill>
-                <a:latin typeface="Microsoft YaHei"/>
+                <a:latin typeface="微软雅黑" panose="020B0503020204020204" charset="-122"/>
               </a:rPr>
               <a:t>如果是答辩或平台验收，按这条线讲，节奏最顺，也最容易把亮点讲明白。</a:t>
             </a:r>
+            <a:endParaRPr sz="1150" b="0">
+              <a:solidFill>
+                <a:srgbClr val="5B6B7A"/>
+              </a:solidFill>
+              <a:latin typeface="微软雅黑" panose="020B0503020204020204" charset="-122"/>
+            </a:endParaRPr>
           </a:p>
         </p:txBody>
       </p:sp>
@@ -4390,7 +4465,7 @@
           <a:noFill/>
         </p:spPr>
         <p:txBody>
-          <a:bodyPr wrap="square" lIns="0" rIns="0" tIns="0" bIns="0">
+          <a:bodyPr wrap="square" lIns="0" tIns="0" rIns="0" bIns="0">
             <a:spAutoFit/>
           </a:bodyPr>
           <a:lstStyle/>
@@ -4406,7 +4481,7 @@
                 <a:solidFill>
                   <a:srgbClr val="1E293B"/>
                 </a:solidFill>
-                <a:latin typeface="Microsoft YaHei"/>
+                <a:latin typeface="微软雅黑" panose="020B0503020204020204" charset="-122"/>
               </a:defRPr>
             </a:pPr>
             <a:r>
@@ -4425,7 +4500,7 @@
                 <a:solidFill>
                   <a:srgbClr val="1E293B"/>
                 </a:solidFill>
-                <a:latin typeface="Microsoft YaHei"/>
+                <a:latin typeface="微软雅黑" panose="020B0503020204020204" charset="-122"/>
               </a:defRPr>
             </a:pPr>
             <a:r>
@@ -4444,7 +4519,7 @@
                 <a:solidFill>
                   <a:srgbClr val="1E293B"/>
                 </a:solidFill>
-                <a:latin typeface="Microsoft YaHei"/>
+                <a:latin typeface="微软雅黑" panose="020B0503020204020204" charset="-122"/>
               </a:defRPr>
             </a:pPr>
             <a:r>
@@ -4463,7 +4538,7 @@
                 <a:solidFill>
                   <a:srgbClr val="1E293B"/>
                 </a:solidFill>
-                <a:latin typeface="Microsoft YaHei"/>
+                <a:latin typeface="微软雅黑" panose="020B0503020204020204" charset="-122"/>
               </a:defRPr>
             </a:pPr>
             <a:r>
@@ -4482,7 +4557,7 @@
                 <a:solidFill>
                   <a:srgbClr val="1E293B"/>
                 </a:solidFill>
-                <a:latin typeface="Microsoft YaHei"/>
+                <a:latin typeface="微软雅黑" panose="020B0503020204020204" charset="-122"/>
               </a:defRPr>
             </a:pPr>
             <a:r>
@@ -4553,7 +4628,7 @@
           <a:noFill/>
         </p:spPr>
         <p:txBody>
-          <a:bodyPr wrap="square" lIns="0" rIns="0" tIns="0" bIns="0" anchor="t">
+          <a:bodyPr wrap="square" lIns="0" tIns="0" rIns="0" bIns="0" anchor="t">
             <a:spAutoFit/>
           </a:bodyPr>
           <a:lstStyle/>
@@ -4568,10 +4643,16 @@
                 <a:solidFill>
                   <a:srgbClr val="0E7490"/>
                 </a:solidFill>
-                <a:latin typeface="Microsoft YaHei"/>
+                <a:latin typeface="微软雅黑" panose="020B0503020204020204" charset="-122"/>
               </a:rPr>
               <a:t>讲解时建议强调</a:t>
             </a:r>
+            <a:endParaRPr sz="1600" b="1">
+              <a:solidFill>
+                <a:srgbClr val="0E7490"/>
+              </a:solidFill>
+              <a:latin typeface="微软雅黑" panose="020B0503020204020204" charset="-122"/>
+            </a:endParaRPr>
           </a:p>
         </p:txBody>
       </p:sp>
@@ -4592,7 +4673,7 @@
           <a:noFill/>
         </p:spPr>
         <p:txBody>
-          <a:bodyPr wrap="square" lIns="0" rIns="0" tIns="0" bIns="0">
+          <a:bodyPr wrap="square" lIns="0" tIns="0" rIns="0" bIns="0">
             <a:spAutoFit/>
           </a:bodyPr>
           <a:lstStyle/>
@@ -4608,7 +4689,7 @@
                 <a:solidFill>
                   <a:srgbClr val="1E293B"/>
                 </a:solidFill>
-                <a:latin typeface="Microsoft YaHei"/>
+                <a:latin typeface="微软雅黑" panose="020B0503020204020204" charset="-122"/>
               </a:defRPr>
             </a:pPr>
             <a:r>
@@ -4627,7 +4708,7 @@
                 <a:solidFill>
                   <a:srgbClr val="1E293B"/>
                 </a:solidFill>
-                <a:latin typeface="Microsoft YaHei"/>
+                <a:latin typeface="微软雅黑" panose="020B0503020204020204" charset="-122"/>
               </a:defRPr>
             </a:pPr>
             <a:r>
@@ -4646,7 +4727,7 @@
                 <a:solidFill>
                   <a:srgbClr val="1E293B"/>
                 </a:solidFill>
-                <a:latin typeface="Microsoft YaHei"/>
+                <a:latin typeface="微软雅黑" panose="020B0503020204020204" charset="-122"/>
               </a:defRPr>
             </a:pPr>
             <a:r>
@@ -4665,7 +4746,7 @@
                 <a:solidFill>
                   <a:srgbClr val="1E293B"/>
                 </a:solidFill>
-                <a:latin typeface="Microsoft YaHei"/>
+                <a:latin typeface="微软雅黑" panose="020B0503020204020204" charset="-122"/>
               </a:defRPr>
             </a:pPr>
             <a:r>
@@ -4683,7 +4764,7 @@
 </file>
 
 <file path=ppt/slides/slide12.xml><?xml version="1.0" encoding="utf-8"?>
-<p:sld xmlns:a="http://schemas.openxmlformats.org/drawingml/2006/main" xmlns:p="http://schemas.openxmlformats.org/presentationml/2006/main" xmlns:r="http://schemas.openxmlformats.org/officeDocument/2006/relationships">
+<p:sld xmlns:a="http://schemas.openxmlformats.org/drawingml/2006/main" xmlns:r="http://schemas.openxmlformats.org/officeDocument/2006/relationships" xmlns:p="http://schemas.openxmlformats.org/presentationml/2006/main">
   <p:cSld>
     <p:bg>
       <p:bgPr>
@@ -4717,7 +4798,7 @@
           <a:noFill/>
         </p:spPr>
         <p:txBody>
-          <a:bodyPr wrap="square" lIns="0" rIns="0" tIns="0" bIns="0" anchor="t">
+          <a:bodyPr wrap="square" lIns="0" tIns="0" rIns="0" bIns="0" anchor="t">
             <a:spAutoFit/>
           </a:bodyPr>
           <a:lstStyle/>
@@ -4732,10 +4813,16 @@
                 <a:solidFill>
                   <a:srgbClr val="F4B740"/>
                 </a:solidFill>
-                <a:latin typeface="Microsoft YaHei"/>
+                <a:latin typeface="微软雅黑" panose="020B0503020204020204" charset="-122"/>
               </a:rPr>
               <a:t>总结</a:t>
             </a:r>
+            <a:endParaRPr sz="1800" b="1">
+              <a:solidFill>
+                <a:srgbClr val="F4B740"/>
+              </a:solidFill>
+              <a:latin typeface="微软雅黑" panose="020B0503020204020204" charset="-122"/>
+            </a:endParaRPr>
           </a:p>
         </p:txBody>
       </p:sp>
@@ -4756,7 +4843,7 @@
           <a:noFill/>
         </p:spPr>
         <p:txBody>
-          <a:bodyPr wrap="square" lIns="0" rIns="0" tIns="0" bIns="0" anchor="t">
+          <a:bodyPr wrap="square" lIns="0" tIns="0" rIns="0" bIns="0" anchor="t">
             <a:spAutoFit/>
           </a:bodyPr>
           <a:lstStyle/>
@@ -4771,11 +4858,17 @@
                 <a:solidFill>
                   <a:srgbClr val="FFFFFF"/>
                 </a:solidFill>
-                <a:latin typeface="Microsoft YaHei"/>
+                <a:latin typeface="微软雅黑" panose="020B0503020204020204" charset="-122"/>
               </a:rPr>
               <a:t>VoiceInput Pro 已经具备一套完整的产品骨架：
 能处理、能复核、能沉淀、能导出，也能解释这套结果是怎么来的。</a:t>
             </a:r>
+            <a:endParaRPr sz="2400" b="1">
+              <a:solidFill>
+                <a:srgbClr val="FFFFFF"/>
+              </a:solidFill>
+              <a:latin typeface="微软雅黑" panose="020B0503020204020204" charset="-122"/>
+            </a:endParaRPr>
           </a:p>
         </p:txBody>
       </p:sp>
@@ -4796,7 +4889,7 @@
           <a:noFill/>
         </p:spPr>
         <p:txBody>
-          <a:bodyPr wrap="square" lIns="0" rIns="0" tIns="0" bIns="0" anchor="t">
+          <a:bodyPr wrap="square" lIns="0" tIns="0" rIns="0" bIns="0" anchor="t">
             <a:spAutoFit/>
           </a:bodyPr>
           <a:lstStyle/>
@@ -4811,11 +4904,17 @@
                 <a:solidFill>
                   <a:srgbClr val="DBE5EC"/>
                 </a:solidFill>
-                <a:latin typeface="Microsoft YaHei"/>
+                <a:latin typeface="微软雅黑" panose="020B0503020204020204" charset="-122"/>
               </a:rPr>
               <a:t>从项目展示角度看，它的优势不只是页面整齐，而是流程完整、数据成链、讲解有抓手。
 如果后续继续扩展，这套平台也有空间往实时录音、团队协作和更多模型策略上走。</a:t>
             </a:r>
+            <a:endParaRPr sz="1650" b="0">
+              <a:solidFill>
+                <a:srgbClr val="DBE5EC"/>
+              </a:solidFill>
+              <a:latin typeface="微软雅黑" panose="020B0503020204020204" charset="-122"/>
+            </a:endParaRPr>
           </a:p>
         </p:txBody>
       </p:sp>
@@ -4873,7 +4972,7 @@
           <p:nvPr/>
         </p:nvPicPr>
         <p:blipFill>
-          <a:blip r:embed="rId2"/>
+          <a:blip r:embed="rId1"/>
           <a:stretch>
             <a:fillRect/>
           </a:stretch>
@@ -4905,7 +5004,7 @@
           <a:noFill/>
         </p:spPr>
         <p:txBody>
-          <a:bodyPr wrap="square" lIns="0" rIns="0" tIns="0" bIns="0" anchor="ctr">
+          <a:bodyPr wrap="square" lIns="0" tIns="0" rIns="0" bIns="0" anchor="ctr">
             <a:spAutoFit/>
           </a:bodyPr>
           <a:lstStyle/>
@@ -4920,10 +5019,16 @@
                 <a:solidFill>
                   <a:srgbClr val="5B6B7A"/>
                 </a:solidFill>
-                <a:latin typeface="Microsoft YaHei"/>
+                <a:latin typeface="微软雅黑" panose="020B0503020204020204" charset="-122"/>
               </a:rPr>
               <a:t>平台首页</a:t>
             </a:r>
+            <a:endParaRPr sz="1050" b="0">
+              <a:solidFill>
+                <a:srgbClr val="5B6B7A"/>
+              </a:solidFill>
+              <a:latin typeface="微软雅黑" panose="020B0503020204020204" charset="-122"/>
+            </a:endParaRPr>
           </a:p>
         </p:txBody>
       </p:sp>
@@ -4936,7 +5041,7 @@
 </file>
 
 <file path=ppt/slides/slide2.xml><?xml version="1.0" encoding="utf-8"?>
-<p:sld xmlns:a="http://schemas.openxmlformats.org/drawingml/2006/main" xmlns:p="http://schemas.openxmlformats.org/presentationml/2006/main" xmlns:r="http://schemas.openxmlformats.org/officeDocument/2006/relationships">
+<p:sld xmlns:a="http://schemas.openxmlformats.org/drawingml/2006/main" xmlns:r="http://schemas.openxmlformats.org/officeDocument/2006/relationships" xmlns:p="http://schemas.openxmlformats.org/presentationml/2006/main">
   <p:cSld>
     <p:bg>
       <p:bgPr>
@@ -4970,7 +5075,7 @@
           <a:noFill/>
         </p:spPr>
         <p:txBody>
-          <a:bodyPr wrap="square" lIns="0" rIns="0" tIns="0" bIns="0" anchor="t">
+          <a:bodyPr wrap="square" lIns="0" tIns="0" rIns="0" bIns="0" anchor="t">
             <a:spAutoFit/>
           </a:bodyPr>
           <a:lstStyle/>
@@ -4985,10 +5090,16 @@
                 <a:solidFill>
                   <a:srgbClr val="183B5B"/>
                 </a:solidFill>
-                <a:latin typeface="Microsoft YaHei"/>
+                <a:latin typeface="微软雅黑" panose="020B0503020204020204" charset="-122"/>
               </a:rPr>
               <a:t>这套平台解决什么问题</a:t>
             </a:r>
+            <a:endParaRPr sz="2800" b="1">
+              <a:solidFill>
+                <a:srgbClr val="183B5B"/>
+              </a:solidFill>
+              <a:latin typeface="微软雅黑" panose="020B0503020204020204" charset="-122"/>
+            </a:endParaRPr>
           </a:p>
         </p:txBody>
       </p:sp>
@@ -5009,7 +5120,7 @@
           <a:noFill/>
         </p:spPr>
         <p:txBody>
-          <a:bodyPr wrap="square" lIns="0" rIns="0" tIns="0" bIns="0" anchor="t">
+          <a:bodyPr wrap="square" lIns="0" tIns="0" rIns="0" bIns="0" anchor="t">
             <a:spAutoFit/>
           </a:bodyPr>
           <a:lstStyle/>
@@ -5024,10 +5135,16 @@
                 <a:solidFill>
                   <a:srgbClr val="5B6B7A"/>
                 </a:solidFill>
-                <a:latin typeface="Microsoft YaHei"/>
+                <a:latin typeface="微软雅黑" panose="020B0503020204020204" charset="-122"/>
               </a:rPr>
               <a:t>它不是简单的“语音转文字”，而是把转写、整理、复核和交付串成一条完整工作流。</a:t>
             </a:r>
+            <a:endParaRPr sz="1150" b="0">
+              <a:solidFill>
+                <a:srgbClr val="5B6B7A"/>
+              </a:solidFill>
+              <a:latin typeface="微软雅黑" panose="020B0503020204020204" charset="-122"/>
+            </a:endParaRPr>
           </a:p>
         </p:txBody>
       </p:sp>
@@ -5136,7 +5253,7 @@
           <a:noFill/>
         </p:spPr>
         <p:txBody>
-          <a:bodyPr wrap="square" lIns="0" rIns="0" tIns="0" bIns="0" anchor="t">
+          <a:bodyPr wrap="square" lIns="0" tIns="0" rIns="0" bIns="0" anchor="t">
             <a:spAutoFit/>
           </a:bodyPr>
           <a:lstStyle/>
@@ -5151,10 +5268,16 @@
                 <a:solidFill>
                   <a:srgbClr val="183B5B"/>
                 </a:solidFill>
-                <a:latin typeface="Microsoft YaHei"/>
+                <a:latin typeface="微软雅黑" panose="020B0503020204020204" charset="-122"/>
               </a:rPr>
               <a:t>6 类场景</a:t>
             </a:r>
+            <a:endParaRPr sz="2600" b="1">
+              <a:solidFill>
+                <a:srgbClr val="183B5B"/>
+              </a:solidFill>
+              <a:latin typeface="微软雅黑" panose="020B0503020204020204" charset="-122"/>
+            </a:endParaRPr>
           </a:p>
         </p:txBody>
       </p:sp>
@@ -5175,7 +5298,7 @@
           <a:noFill/>
         </p:spPr>
         <p:txBody>
-          <a:bodyPr wrap="square" lIns="0" rIns="0" tIns="0" bIns="0" anchor="t">
+          <a:bodyPr wrap="square" lIns="0" tIns="0" rIns="0" bIns="0" anchor="t">
             <a:spAutoFit/>
           </a:bodyPr>
           <a:lstStyle/>
@@ -5190,10 +5313,16 @@
                 <a:solidFill>
                   <a:srgbClr val="0E7490"/>
                 </a:solidFill>
-                <a:latin typeface="Microsoft YaHei"/>
+                <a:latin typeface="微软雅黑" panose="020B0503020204020204" charset="-122"/>
               </a:rPr>
               <a:t>按场景组织输出</a:t>
             </a:r>
+            <a:endParaRPr sz="1100" b="1">
+              <a:solidFill>
+                <a:srgbClr val="0E7490"/>
+              </a:solidFill>
+              <a:latin typeface="微软雅黑" panose="020B0503020204020204" charset="-122"/>
+            </a:endParaRPr>
           </a:p>
         </p:txBody>
       </p:sp>
@@ -5214,7 +5343,7 @@
           <a:noFill/>
         </p:spPr>
         <p:txBody>
-          <a:bodyPr wrap="square" lIns="0" rIns="0" tIns="0" bIns="0" anchor="t">
+          <a:bodyPr wrap="square" lIns="0" tIns="0" rIns="0" bIns="0" anchor="t">
             <a:spAutoFit/>
           </a:bodyPr>
           <a:lstStyle/>
@@ -5229,10 +5358,16 @@
                 <a:solidFill>
                   <a:srgbClr val="5B6B7A"/>
                 </a:solidFill>
-                <a:latin typeface="Microsoft YaHei"/>
+                <a:latin typeface="微软雅黑" panose="020B0503020204020204" charset="-122"/>
               </a:rPr>
               <a:t>支持会议纪要、工作汇报、正式表达、Markdown 笔记、代码注释、聊天回复。</a:t>
             </a:r>
+            <a:endParaRPr sz="1050" b="0">
+              <a:solidFill>
+                <a:srgbClr val="5B6B7A"/>
+              </a:solidFill>
+              <a:latin typeface="微软雅黑" panose="020B0503020204020204" charset="-122"/>
+            </a:endParaRPr>
           </a:p>
         </p:txBody>
       </p:sp>
@@ -5298,7 +5433,7 @@
           <a:noFill/>
         </p:spPr>
         <p:txBody>
-          <a:bodyPr wrap="square" lIns="0" rIns="0" tIns="0" bIns="0" anchor="t">
+          <a:bodyPr wrap="square" lIns="0" tIns="0" rIns="0" bIns="0" anchor="t">
             <a:spAutoFit/>
           </a:bodyPr>
           <a:lstStyle/>
@@ -5313,10 +5448,16 @@
                 <a:solidFill>
                   <a:srgbClr val="183B5B"/>
                 </a:solidFill>
-                <a:latin typeface="Microsoft YaHei"/>
+                <a:latin typeface="微软雅黑" panose="020B0503020204020204" charset="-122"/>
               </a:rPr>
               <a:t>双文本输出</a:t>
             </a:r>
+            <a:endParaRPr sz="2600" b="1">
+              <a:solidFill>
+                <a:srgbClr val="183B5B"/>
+              </a:solidFill>
+              <a:latin typeface="微软雅黑" panose="020B0503020204020204" charset="-122"/>
+            </a:endParaRPr>
           </a:p>
         </p:txBody>
       </p:sp>
@@ -5337,7 +5478,7 @@
           <a:noFill/>
         </p:spPr>
         <p:txBody>
-          <a:bodyPr wrap="square" lIns="0" rIns="0" tIns="0" bIns="0" anchor="t">
+          <a:bodyPr wrap="square" lIns="0" tIns="0" rIns="0" bIns="0" anchor="t">
             <a:spAutoFit/>
           </a:bodyPr>
           <a:lstStyle/>
@@ -5352,10 +5493,16 @@
                 <a:solidFill>
                   <a:srgbClr val="0E7490"/>
                 </a:solidFill>
-                <a:latin typeface="Microsoft YaHei"/>
+                <a:latin typeface="微软雅黑" panose="020B0503020204020204" charset="-122"/>
               </a:rPr>
               <a:t>原文 + 优化文并行展示</a:t>
             </a:r>
+            <a:endParaRPr sz="1100" b="1">
+              <a:solidFill>
+                <a:srgbClr val="0E7490"/>
+              </a:solidFill>
+              <a:latin typeface="微软雅黑" panose="020B0503020204020204" charset="-122"/>
+            </a:endParaRPr>
           </a:p>
         </p:txBody>
       </p:sp>
@@ -5376,7 +5523,7 @@
           <a:noFill/>
         </p:spPr>
         <p:txBody>
-          <a:bodyPr wrap="square" lIns="0" rIns="0" tIns="0" bIns="0" anchor="t">
+          <a:bodyPr wrap="square" lIns="0" tIns="0" rIns="0" bIns="0" anchor="t">
             <a:spAutoFit/>
           </a:bodyPr>
           <a:lstStyle/>
@@ -5391,10 +5538,16 @@
                 <a:solidFill>
                   <a:srgbClr val="5B6B7A"/>
                 </a:solidFill>
-                <a:latin typeface="Microsoft YaHei"/>
+                <a:latin typeface="微软雅黑" panose="020B0503020204020204" charset="-122"/>
               </a:rPr>
               <a:t>用户能直接比较识别结果和整理结果，知道系统改了什么。</a:t>
             </a:r>
+            <a:endParaRPr sz="1050" b="0">
+              <a:solidFill>
+                <a:srgbClr val="5B6B7A"/>
+              </a:solidFill>
+              <a:latin typeface="微软雅黑" panose="020B0503020204020204" charset="-122"/>
+            </a:endParaRPr>
           </a:p>
         </p:txBody>
       </p:sp>
@@ -5460,7 +5613,7 @@
           <a:noFill/>
         </p:spPr>
         <p:txBody>
-          <a:bodyPr wrap="square" lIns="0" rIns="0" tIns="0" bIns="0" anchor="t">
+          <a:bodyPr wrap="square" lIns="0" tIns="0" rIns="0" bIns="0" anchor="t">
             <a:spAutoFit/>
           </a:bodyPr>
           <a:lstStyle/>
@@ -5475,10 +5628,16 @@
                 <a:solidFill>
                   <a:srgbClr val="183B5B"/>
                 </a:solidFill>
-                <a:latin typeface="Microsoft YaHei"/>
+                <a:latin typeface="微软雅黑" panose="020B0503020204020204" charset="-122"/>
               </a:rPr>
               <a:t>闭环管理</a:t>
             </a:r>
+            <a:endParaRPr sz="2600" b="1">
+              <a:solidFill>
+                <a:srgbClr val="183B5B"/>
+              </a:solidFill>
+              <a:latin typeface="微软雅黑" panose="020B0503020204020204" charset="-122"/>
+            </a:endParaRPr>
           </a:p>
         </p:txBody>
       </p:sp>
@@ -5499,7 +5658,7 @@
           <a:noFill/>
         </p:spPr>
         <p:txBody>
-          <a:bodyPr wrap="square" lIns="0" rIns="0" tIns="0" bIns="0" anchor="t">
+          <a:bodyPr wrap="square" lIns="0" tIns="0" rIns="0" bIns="0" anchor="t">
             <a:spAutoFit/>
           </a:bodyPr>
           <a:lstStyle/>
@@ -5514,10 +5673,16 @@
                 <a:solidFill>
                   <a:srgbClr val="0E7490"/>
                 </a:solidFill>
-                <a:latin typeface="Microsoft YaHei"/>
+                <a:latin typeface="微软雅黑" panose="020B0503020204020204" charset="-122"/>
               </a:rPr>
               <a:t>处理后还能继续用</a:t>
             </a:r>
+            <a:endParaRPr sz="1100" b="1">
+              <a:solidFill>
+                <a:srgbClr val="0E7490"/>
+              </a:solidFill>
+              <a:latin typeface="微软雅黑" panose="020B0503020204020204" charset="-122"/>
+            </a:endParaRPr>
           </a:p>
         </p:txBody>
       </p:sp>
@@ -5538,7 +5703,7 @@
           <a:noFill/>
         </p:spPr>
         <p:txBody>
-          <a:bodyPr wrap="square" lIns="0" rIns="0" tIns="0" bIns="0" anchor="t">
+          <a:bodyPr wrap="square" lIns="0" tIns="0" rIns="0" bIns="0" anchor="t">
             <a:spAutoFit/>
           </a:bodyPr>
           <a:lstStyle/>
@@ -5553,10 +5718,16 @@
                 <a:solidFill>
                   <a:srgbClr val="5B6B7A"/>
                 </a:solidFill>
-                <a:latin typeface="Microsoft YaHei"/>
+                <a:latin typeface="微软雅黑" panose="020B0503020204020204" charset="-122"/>
               </a:rPr>
               <a:t>结果可以进入历史、参与人工校对、导出成文档，也能进入统计分析。</a:t>
             </a:r>
+            <a:endParaRPr sz="1050" b="0">
+              <a:solidFill>
+                <a:srgbClr val="5B6B7A"/>
+              </a:solidFill>
+              <a:latin typeface="微软雅黑" panose="020B0503020204020204" charset="-122"/>
+            </a:endParaRPr>
           </a:p>
         </p:txBody>
       </p:sp>
@@ -5622,7 +5793,7 @@
           <a:noFill/>
         </p:spPr>
         <p:txBody>
-          <a:bodyPr wrap="square" lIns="0" rIns="0" tIns="0" bIns="0" anchor="t">
+          <a:bodyPr wrap="square" lIns="0" tIns="0" rIns="0" bIns="0" anchor="t">
             <a:spAutoFit/>
           </a:bodyPr>
           <a:lstStyle/>
@@ -5637,10 +5808,16 @@
                 <a:solidFill>
                   <a:srgbClr val="183B5B"/>
                 </a:solidFill>
-                <a:latin typeface="Microsoft YaHei"/>
+                <a:latin typeface="微软雅黑" panose="020B0503020204020204" charset="-122"/>
               </a:rPr>
               <a:t>面向演示</a:t>
             </a:r>
+            <a:endParaRPr sz="2600" b="1">
+              <a:solidFill>
+                <a:srgbClr val="183B5B"/>
+              </a:solidFill>
+              <a:latin typeface="微软雅黑" panose="020B0503020204020204" charset="-122"/>
+            </a:endParaRPr>
           </a:p>
         </p:txBody>
       </p:sp>
@@ -5661,7 +5838,7 @@
           <a:noFill/>
         </p:spPr>
         <p:txBody>
-          <a:bodyPr wrap="square" lIns="0" rIns="0" tIns="0" bIns="0" anchor="t">
+          <a:bodyPr wrap="square" lIns="0" tIns="0" rIns="0" bIns="0" anchor="t">
             <a:spAutoFit/>
           </a:bodyPr>
           <a:lstStyle/>
@@ -5676,10 +5853,16 @@
                 <a:solidFill>
                   <a:srgbClr val="0E7490"/>
                 </a:solidFill>
-                <a:latin typeface="Microsoft YaHei"/>
+                <a:latin typeface="微软雅黑" panose="020B0503020204020204" charset="-122"/>
               </a:rPr>
               <a:t>每个入口都有实际动作</a:t>
             </a:r>
+            <a:endParaRPr sz="1100" b="1">
+              <a:solidFill>
+                <a:srgbClr val="0E7490"/>
+              </a:solidFill>
+              <a:latin typeface="微软雅黑" panose="020B0503020204020204" charset="-122"/>
+            </a:endParaRPr>
           </a:p>
         </p:txBody>
       </p:sp>
@@ -5700,7 +5883,7 @@
           <a:noFill/>
         </p:spPr>
         <p:txBody>
-          <a:bodyPr wrap="square" lIns="0" rIns="0" tIns="0" bIns="0" anchor="t">
+          <a:bodyPr wrap="square" lIns="0" tIns="0" rIns="0" bIns="0" anchor="t">
             <a:spAutoFit/>
           </a:bodyPr>
           <a:lstStyle/>
@@ -5715,10 +5898,16 @@
                 <a:solidFill>
                   <a:srgbClr val="5B6B7A"/>
                 </a:solidFill>
-                <a:latin typeface="Microsoft YaHei"/>
+                <a:latin typeface="微软雅黑" panose="020B0503020204020204" charset="-122"/>
               </a:rPr>
               <a:t>页面保留的按钮、筛选、导出、统计，都对应后端能力，而不是静态摆设。</a:t>
             </a:r>
+            <a:endParaRPr sz="1050" b="0">
+              <a:solidFill>
+                <a:srgbClr val="5B6B7A"/>
+              </a:solidFill>
+              <a:latin typeface="微软雅黑" panose="020B0503020204020204" charset="-122"/>
+            </a:endParaRPr>
           </a:p>
         </p:txBody>
       </p:sp>
@@ -5739,7 +5928,7 @@
           <a:noFill/>
         </p:spPr>
         <p:txBody>
-          <a:bodyPr wrap="square" lIns="0" rIns="0" tIns="0" bIns="0">
+          <a:bodyPr wrap="square" lIns="0" tIns="0" rIns="0" bIns="0">
             <a:spAutoFit/>
           </a:bodyPr>
           <a:lstStyle/>
@@ -5755,7 +5944,7 @@
                 <a:solidFill>
                   <a:srgbClr val="1E293B"/>
                 </a:solidFill>
-                <a:latin typeface="Microsoft YaHei"/>
+                <a:latin typeface="微软雅黑" panose="020B0503020204020204" charset="-122"/>
               </a:defRPr>
             </a:pPr>
             <a:r>
@@ -5774,7 +5963,7 @@
                 <a:solidFill>
                   <a:srgbClr val="1E293B"/>
                 </a:solidFill>
-                <a:latin typeface="Microsoft YaHei"/>
+                <a:latin typeface="微软雅黑" panose="020B0503020204020204" charset="-122"/>
               </a:defRPr>
             </a:pPr>
             <a:r>
@@ -5793,7 +5982,7 @@
                 <a:solidFill>
                   <a:srgbClr val="1E293B"/>
                 </a:solidFill>
-                <a:latin typeface="Microsoft YaHei"/>
+                <a:latin typeface="微软雅黑" panose="020B0503020204020204" charset="-122"/>
               </a:defRPr>
             </a:pPr>
             <a:r>
@@ -5864,7 +6053,7 @@
           <a:noFill/>
         </p:spPr>
         <p:txBody>
-          <a:bodyPr wrap="square" lIns="0" rIns="0" tIns="0" bIns="0" anchor="t">
+          <a:bodyPr wrap="square" lIns="0" tIns="0" rIns="0" bIns="0" anchor="t">
             <a:spAutoFit/>
           </a:bodyPr>
           <a:lstStyle/>
@@ -5879,10 +6068,16 @@
                 <a:solidFill>
                   <a:srgbClr val="0E7490"/>
                 </a:solidFill>
-                <a:latin typeface="Microsoft YaHei"/>
+                <a:latin typeface="微软雅黑" panose="020B0503020204020204" charset="-122"/>
               </a:rPr>
               <a:t>一句话理解</a:t>
             </a:r>
+            <a:endParaRPr sz="1600" b="1">
+              <a:solidFill>
+                <a:srgbClr val="0E7490"/>
+              </a:solidFill>
+              <a:latin typeface="微软雅黑" panose="020B0503020204020204" charset="-122"/>
+            </a:endParaRPr>
           </a:p>
         </p:txBody>
       </p:sp>
@@ -5903,7 +6098,7 @@
           <a:noFill/>
         </p:spPr>
         <p:txBody>
-          <a:bodyPr wrap="square" lIns="0" rIns="0" tIns="0" bIns="0" anchor="t">
+          <a:bodyPr wrap="square" lIns="0" tIns="0" rIns="0" bIns="0" anchor="t">
             <a:spAutoFit/>
           </a:bodyPr>
           <a:lstStyle/>
@@ -5918,10 +6113,16 @@
                 <a:solidFill>
                   <a:srgbClr val="1E293B"/>
                 </a:solidFill>
-                <a:latin typeface="Microsoft YaHei"/>
+                <a:latin typeface="微软雅黑" panose="020B0503020204020204" charset="-122"/>
               </a:rPr>
               <a:t>它更像一张“语音内容工作台”，不是录完就结束，而是让结果继续流进历史、热词、配置和导出体系里。</a:t>
             </a:r>
+            <a:endParaRPr sz="1900" b="1">
+              <a:solidFill>
+                <a:srgbClr val="1E293B"/>
+              </a:solidFill>
+              <a:latin typeface="微软雅黑" panose="020B0503020204020204" charset="-122"/>
+            </a:endParaRPr>
           </a:p>
         </p:txBody>
       </p:sp>
@@ -5934,7 +6135,7 @@
 </file>
 
 <file path=ppt/slides/slide3.xml><?xml version="1.0" encoding="utf-8"?>
-<p:sld xmlns:a="http://schemas.openxmlformats.org/drawingml/2006/main" xmlns:p="http://schemas.openxmlformats.org/presentationml/2006/main" xmlns:r="http://schemas.openxmlformats.org/officeDocument/2006/relationships">
+<p:sld xmlns:a="http://schemas.openxmlformats.org/drawingml/2006/main" xmlns:r="http://schemas.openxmlformats.org/officeDocument/2006/relationships" xmlns:p="http://schemas.openxmlformats.org/presentationml/2006/main">
   <p:cSld>
     <p:bg>
       <p:bgPr>
@@ -5968,7 +6169,7 @@
           <a:noFill/>
         </p:spPr>
         <p:txBody>
-          <a:bodyPr wrap="square" lIns="0" rIns="0" tIns="0" bIns="0" anchor="t">
+          <a:bodyPr wrap="square" lIns="0" tIns="0" rIns="0" bIns="0" anchor="t">
             <a:spAutoFit/>
           </a:bodyPr>
           <a:lstStyle/>
@@ -5983,10 +6184,16 @@
                 <a:solidFill>
                   <a:srgbClr val="183B5B"/>
                 </a:solidFill>
-                <a:latin typeface="Microsoft YaHei"/>
+                <a:latin typeface="微软雅黑" panose="020B0503020204020204" charset="-122"/>
               </a:rPr>
               <a:t>页面结构一眼看清</a:t>
             </a:r>
+            <a:endParaRPr sz="2800" b="1">
+              <a:solidFill>
+                <a:srgbClr val="183B5B"/>
+              </a:solidFill>
+              <a:latin typeface="微软雅黑" panose="020B0503020204020204" charset="-122"/>
+            </a:endParaRPr>
           </a:p>
         </p:txBody>
       </p:sp>
@@ -6007,7 +6214,7 @@
           <a:noFill/>
         </p:spPr>
         <p:txBody>
-          <a:bodyPr wrap="square" lIns="0" rIns="0" tIns="0" bIns="0" anchor="t">
+          <a:bodyPr wrap="square" lIns="0" tIns="0" rIns="0" bIns="0" anchor="t">
             <a:spAutoFit/>
           </a:bodyPr>
           <a:lstStyle/>
@@ -6022,10 +6229,16 @@
                 <a:solidFill>
                   <a:srgbClr val="5B6B7A"/>
                 </a:solidFill>
-                <a:latin typeface="Microsoft YaHei"/>
+                <a:latin typeface="微软雅黑" panose="020B0503020204020204" charset="-122"/>
               </a:rPr>
               <a:t>顶部导航把核心能力拆成五块，符合从“生产结果”到“管理结果”的使用顺序。</a:t>
             </a:r>
+            <a:endParaRPr sz="1150" b="0">
+              <a:solidFill>
+                <a:srgbClr val="5B6B7A"/>
+              </a:solidFill>
+              <a:latin typeface="微软雅黑" panose="020B0503020204020204" charset="-122"/>
+            </a:endParaRPr>
           </a:p>
         </p:txBody>
       </p:sp>
@@ -6177,7 +6390,7 @@
           <a:noFill/>
         </p:spPr>
         <p:txBody>
-          <a:bodyPr wrap="square" lIns="0" rIns="0" tIns="0" bIns="0" anchor="t">
+          <a:bodyPr wrap="square" lIns="0" tIns="0" rIns="0" bIns="0" anchor="t">
             <a:spAutoFit/>
           </a:bodyPr>
           <a:lstStyle/>
@@ -6192,10 +6405,16 @@
                 <a:solidFill>
                   <a:srgbClr val="183B5B"/>
                 </a:solidFill>
-                <a:latin typeface="Microsoft YaHei"/>
+                <a:latin typeface="微软雅黑" panose="020B0503020204020204" charset="-122"/>
               </a:rPr>
               <a:t>工作台</a:t>
             </a:r>
+            <a:endParaRPr sz="1700" b="1">
+              <a:solidFill>
+                <a:srgbClr val="183B5B"/>
+              </a:solidFill>
+              <a:latin typeface="微软雅黑" panose="020B0503020204020204" charset="-122"/>
+            </a:endParaRPr>
           </a:p>
         </p:txBody>
       </p:sp>
@@ -6216,7 +6435,7 @@
           <a:noFill/>
         </p:spPr>
         <p:txBody>
-          <a:bodyPr wrap="square" lIns="0" rIns="0" tIns="0" bIns="0" anchor="t">
+          <a:bodyPr wrap="square" lIns="0" tIns="0" rIns="0" bIns="0" anchor="t">
             <a:spAutoFit/>
           </a:bodyPr>
           <a:lstStyle/>
@@ -6231,10 +6450,16 @@
                 <a:solidFill>
                   <a:srgbClr val="5B6B7A"/>
                 </a:solidFill>
-                <a:latin typeface="Microsoft YaHei"/>
+                <a:latin typeface="微软雅黑" panose="020B0503020204020204" charset="-122"/>
               </a:rPr>
               <a:t>选择场景、上传音频、开始处理、查看原文和优化文。</a:t>
             </a:r>
+            <a:endParaRPr sz="1200" b="0">
+              <a:solidFill>
+                <a:srgbClr val="5B6B7A"/>
+              </a:solidFill>
+              <a:latin typeface="微软雅黑" panose="020B0503020204020204" charset="-122"/>
+            </a:endParaRPr>
           </a:p>
         </p:txBody>
       </p:sp>
@@ -6343,7 +6568,7 @@
           <a:noFill/>
         </p:spPr>
         <p:txBody>
-          <a:bodyPr wrap="square" lIns="0" rIns="0" tIns="0" bIns="0" anchor="t">
+          <a:bodyPr wrap="square" lIns="0" tIns="0" rIns="0" bIns="0" anchor="t">
             <a:spAutoFit/>
           </a:bodyPr>
           <a:lstStyle/>
@@ -6358,10 +6583,16 @@
                 <a:solidFill>
                   <a:srgbClr val="183B5B"/>
                 </a:solidFill>
-                <a:latin typeface="Microsoft YaHei"/>
+                <a:latin typeface="微软雅黑" panose="020B0503020204020204" charset="-122"/>
               </a:rPr>
               <a:t>历史记录</a:t>
             </a:r>
+            <a:endParaRPr sz="1700" b="1">
+              <a:solidFill>
+                <a:srgbClr val="183B5B"/>
+              </a:solidFill>
+              <a:latin typeface="微软雅黑" panose="020B0503020204020204" charset="-122"/>
+            </a:endParaRPr>
           </a:p>
         </p:txBody>
       </p:sp>
@@ -6382,7 +6613,7 @@
           <a:noFill/>
         </p:spPr>
         <p:txBody>
-          <a:bodyPr wrap="square" lIns="0" rIns="0" tIns="0" bIns="0" anchor="t">
+          <a:bodyPr wrap="square" lIns="0" tIns="0" rIns="0" bIns="0" anchor="t">
             <a:spAutoFit/>
           </a:bodyPr>
           <a:lstStyle/>
@@ -6397,10 +6628,16 @@
                 <a:solidFill>
                   <a:srgbClr val="5B6B7A"/>
                 </a:solidFill>
-                <a:latin typeface="Microsoft YaHei"/>
+                <a:latin typeface="微软雅黑" panose="020B0503020204020204" charset="-122"/>
               </a:rPr>
               <a:t>集中查看处理结果，支持筛选、详情、再次优化和删除。</a:t>
             </a:r>
+            <a:endParaRPr sz="1200" b="0">
+              <a:solidFill>
+                <a:srgbClr val="5B6B7A"/>
+              </a:solidFill>
+              <a:latin typeface="微软雅黑" panose="020B0503020204020204" charset="-122"/>
+            </a:endParaRPr>
           </a:p>
         </p:txBody>
       </p:sp>
@@ -6509,7 +6746,7 @@
           <a:noFill/>
         </p:spPr>
         <p:txBody>
-          <a:bodyPr wrap="square" lIns="0" rIns="0" tIns="0" bIns="0" anchor="t">
+          <a:bodyPr wrap="square" lIns="0" tIns="0" rIns="0" bIns="0" anchor="t">
             <a:spAutoFit/>
           </a:bodyPr>
           <a:lstStyle/>
@@ -6524,10 +6761,16 @@
                 <a:solidFill>
                   <a:srgbClr val="183B5B"/>
                 </a:solidFill>
-                <a:latin typeface="Microsoft YaHei"/>
+                <a:latin typeface="微软雅黑" panose="020B0503020204020204" charset="-122"/>
               </a:rPr>
               <a:t>导出中心</a:t>
             </a:r>
+            <a:endParaRPr sz="1700" b="1">
+              <a:solidFill>
+                <a:srgbClr val="183B5B"/>
+              </a:solidFill>
+              <a:latin typeface="微软雅黑" panose="020B0503020204020204" charset="-122"/>
+            </a:endParaRPr>
           </a:p>
         </p:txBody>
       </p:sp>
@@ -6548,7 +6791,7 @@
           <a:noFill/>
         </p:spPr>
         <p:txBody>
-          <a:bodyPr wrap="square" lIns="0" rIns="0" tIns="0" bIns="0" anchor="t">
+          <a:bodyPr wrap="square" lIns="0" tIns="0" rIns="0" bIns="0" anchor="t">
             <a:spAutoFit/>
           </a:bodyPr>
           <a:lstStyle/>
@@ -6563,10 +6806,16 @@
                 <a:solidFill>
                   <a:srgbClr val="5B6B7A"/>
                 </a:solidFill>
-                <a:latin typeface="Microsoft YaHei"/>
+                <a:latin typeface="微软雅黑" panose="020B0503020204020204" charset="-122"/>
               </a:rPr>
               <a:t>统一管理 DOCX、Markdown、TXT、JSON 等导出文件。</a:t>
             </a:r>
+            <a:endParaRPr sz="1200" b="0">
+              <a:solidFill>
+                <a:srgbClr val="5B6B7A"/>
+              </a:solidFill>
+              <a:latin typeface="微软雅黑" panose="020B0503020204020204" charset="-122"/>
+            </a:endParaRPr>
           </a:p>
         </p:txBody>
       </p:sp>
@@ -6675,7 +6924,7 @@
           <a:noFill/>
         </p:spPr>
         <p:txBody>
-          <a:bodyPr wrap="square" lIns="0" rIns="0" tIns="0" bIns="0" anchor="t">
+          <a:bodyPr wrap="square" lIns="0" tIns="0" rIns="0" bIns="0" anchor="t">
             <a:spAutoFit/>
           </a:bodyPr>
           <a:lstStyle/>
@@ -6690,10 +6939,16 @@
                 <a:solidFill>
                   <a:srgbClr val="183B5B"/>
                 </a:solidFill>
-                <a:latin typeface="Microsoft YaHei"/>
+                <a:latin typeface="微软雅黑" panose="020B0503020204020204" charset="-122"/>
               </a:rPr>
               <a:t>热词管理</a:t>
             </a:r>
+            <a:endParaRPr sz="1700" b="1">
+              <a:solidFill>
+                <a:srgbClr val="183B5B"/>
+              </a:solidFill>
+              <a:latin typeface="微软雅黑" panose="020B0503020204020204" charset="-122"/>
+            </a:endParaRPr>
           </a:p>
         </p:txBody>
       </p:sp>
@@ -6714,7 +6969,7 @@
           <a:noFill/>
         </p:spPr>
         <p:txBody>
-          <a:bodyPr wrap="square" lIns="0" rIns="0" tIns="0" bIns="0" anchor="t">
+          <a:bodyPr wrap="square" lIns="0" tIns="0" rIns="0" bIns="0" anchor="t">
             <a:spAutoFit/>
           </a:bodyPr>
           <a:lstStyle/>
@@ -6729,10 +6984,16 @@
                 <a:solidFill>
                   <a:srgbClr val="5B6B7A"/>
                 </a:solidFill>
-                <a:latin typeface="Microsoft YaHei"/>
+                <a:latin typeface="微软雅黑" panose="020B0503020204020204" charset="-122"/>
               </a:rPr>
               <a:t>维护术语和误识别修正规则，让后续处理更贴近真实表达。</a:t>
             </a:r>
+            <a:endParaRPr sz="1200" b="0">
+              <a:solidFill>
+                <a:srgbClr val="5B6B7A"/>
+              </a:solidFill>
+              <a:latin typeface="微软雅黑" panose="020B0503020204020204" charset="-122"/>
+            </a:endParaRPr>
           </a:p>
         </p:txBody>
       </p:sp>
@@ -6841,7 +7102,7 @@
           <a:noFill/>
         </p:spPr>
         <p:txBody>
-          <a:bodyPr wrap="square" lIns="0" rIns="0" tIns="0" bIns="0" anchor="t">
+          <a:bodyPr wrap="square" lIns="0" tIns="0" rIns="0" bIns="0" anchor="t">
             <a:spAutoFit/>
           </a:bodyPr>
           <a:lstStyle/>
@@ -6856,10 +7117,16 @@
                 <a:solidFill>
                   <a:srgbClr val="183B5B"/>
                 </a:solidFill>
-                <a:latin typeface="Microsoft YaHei"/>
+                <a:latin typeface="微软雅黑" panose="020B0503020204020204" charset="-122"/>
               </a:rPr>
               <a:t>模型配置</a:t>
             </a:r>
+            <a:endParaRPr sz="1700" b="1">
+              <a:solidFill>
+                <a:srgbClr val="183B5B"/>
+              </a:solidFill>
+              <a:latin typeface="微软雅黑" panose="020B0503020204020204" charset="-122"/>
+            </a:endParaRPr>
           </a:p>
         </p:txBody>
       </p:sp>
@@ -6880,7 +7147,7 @@
           <a:noFill/>
         </p:spPr>
         <p:txBody>
-          <a:bodyPr wrap="square" lIns="0" rIns="0" tIns="0" bIns="0" anchor="t">
+          <a:bodyPr wrap="square" lIns="0" tIns="0" rIns="0" bIns="0" anchor="t">
             <a:spAutoFit/>
           </a:bodyPr>
           <a:lstStyle/>
@@ -6895,10 +7162,16 @@
                 <a:solidFill>
                   <a:srgbClr val="5B6B7A"/>
                 </a:solidFill>
-                <a:latin typeface="Microsoft YaHei"/>
+                <a:latin typeface="微软雅黑" panose="020B0503020204020204" charset="-122"/>
               </a:rPr>
               <a:t>管理模板、模型路线、统计指标和默认处理策略。</a:t>
             </a:r>
+            <a:endParaRPr sz="1200" b="0">
+              <a:solidFill>
+                <a:srgbClr val="5B6B7A"/>
+              </a:solidFill>
+              <a:latin typeface="微软雅黑" panose="020B0503020204020204" charset="-122"/>
+            </a:endParaRPr>
           </a:p>
         </p:txBody>
       </p:sp>
@@ -6911,7 +7184,7 @@
 </file>
 
 <file path=ppt/slides/slide4.xml><?xml version="1.0" encoding="utf-8"?>
-<p:sld xmlns:a="http://schemas.openxmlformats.org/drawingml/2006/main" xmlns:p="http://schemas.openxmlformats.org/presentationml/2006/main" xmlns:r="http://schemas.openxmlformats.org/officeDocument/2006/relationships">
+<p:sld xmlns:a="http://schemas.openxmlformats.org/drawingml/2006/main" xmlns:r="http://schemas.openxmlformats.org/officeDocument/2006/relationships" xmlns:p="http://schemas.openxmlformats.org/presentationml/2006/main">
   <p:cSld>
     <p:bg>
       <p:bgPr>
@@ -6945,7 +7218,7 @@
           <a:noFill/>
         </p:spPr>
         <p:txBody>
-          <a:bodyPr wrap="square" lIns="0" rIns="0" tIns="0" bIns="0" anchor="t">
+          <a:bodyPr wrap="square" lIns="0" tIns="0" rIns="0" bIns="0" anchor="t">
             <a:spAutoFit/>
           </a:bodyPr>
           <a:lstStyle/>
@@ -6960,10 +7233,16 @@
                 <a:solidFill>
                   <a:srgbClr val="183B5B"/>
                 </a:solidFill>
-                <a:latin typeface="Microsoft YaHei"/>
+                <a:latin typeface="微软雅黑" panose="020B0503020204020204" charset="-122"/>
               </a:rPr>
               <a:t>工作台：从一段音频到一份可用文本</a:t>
             </a:r>
+            <a:endParaRPr sz="2800" b="1">
+              <a:solidFill>
+                <a:srgbClr val="183B5B"/>
+              </a:solidFill>
+              <a:latin typeface="微软雅黑" panose="020B0503020204020204" charset="-122"/>
+            </a:endParaRPr>
           </a:p>
         </p:txBody>
       </p:sp>
@@ -6984,7 +7263,7 @@
           <a:noFill/>
         </p:spPr>
         <p:txBody>
-          <a:bodyPr wrap="square" lIns="0" rIns="0" tIns="0" bIns="0" anchor="t">
+          <a:bodyPr wrap="square" lIns="0" tIns="0" rIns="0" bIns="0" anchor="t">
             <a:spAutoFit/>
           </a:bodyPr>
           <a:lstStyle/>
@@ -6999,10 +7278,16 @@
                 <a:solidFill>
                   <a:srgbClr val="5B6B7A"/>
                 </a:solidFill>
-                <a:latin typeface="Microsoft YaHei"/>
+                <a:latin typeface="微软雅黑" panose="020B0503020204020204" charset="-122"/>
               </a:rPr>
               <a:t>这是平台的主入口，用户会在这里完成上传、处理、查看结果和保存历史。</a:t>
             </a:r>
+            <a:endParaRPr sz="1150" b="0">
+              <a:solidFill>
+                <a:srgbClr val="5B6B7A"/>
+              </a:solidFill>
+              <a:latin typeface="微软雅黑" panose="020B0503020204020204" charset="-122"/>
+            </a:endParaRPr>
           </a:p>
         </p:txBody>
       </p:sp>
@@ -7094,30 +7379,6 @@
           </a:p>
         </p:txBody>
       </p:sp>
-      <p:pic>
-        <p:nvPicPr>
-          <p:cNvPr id="6" name="Picture 5" descr="01-workbench.png"/>
-          <p:cNvPicPr>
-            <a:picLocks noChangeAspect="1"/>
-          </p:cNvPicPr>
-          <p:nvPr/>
-        </p:nvPicPr>
-        <p:blipFill>
-          <a:blip r:embed="rId2"/>
-          <a:stretch>
-            <a:fillRect/>
-          </a:stretch>
-        </p:blipFill>
-        <p:spPr>
-          <a:xfrm>
-            <a:off x="2335882" y="1399032"/>
-            <a:ext cx="3091490" cy="4261104"/>
-          </a:xfrm>
-          <a:prstGeom prst="rect">
-            <a:avLst/>
-          </a:prstGeom>
-        </p:spPr>
-      </p:pic>
       <p:sp>
         <p:nvSpPr>
           <p:cNvPr id="7" name="TextBox 6"/>
@@ -7135,7 +7396,7 @@
           <a:noFill/>
         </p:spPr>
         <p:txBody>
-          <a:bodyPr wrap="square" lIns="0" rIns="0" tIns="0" bIns="0" anchor="ctr">
+          <a:bodyPr wrap="square" lIns="0" tIns="0" rIns="0" bIns="0" anchor="ctr">
             <a:spAutoFit/>
           </a:bodyPr>
           <a:lstStyle/>
@@ -7150,10 +7411,16 @@
                 <a:solidFill>
                   <a:srgbClr val="5B6B7A"/>
                 </a:solidFill>
-                <a:latin typeface="Microsoft YaHei"/>
+                <a:latin typeface="微软雅黑" panose="020B0503020204020204" charset="-122"/>
               </a:rPr>
               <a:t>工作台页面</a:t>
             </a:r>
+            <a:endParaRPr sz="1050" b="0">
+              <a:solidFill>
+                <a:srgbClr val="5B6B7A"/>
+              </a:solidFill>
+              <a:latin typeface="微软雅黑" panose="020B0503020204020204" charset="-122"/>
+            </a:endParaRPr>
           </a:p>
         </p:txBody>
       </p:sp>
@@ -7174,7 +7441,7 @@
           <a:noFill/>
         </p:spPr>
         <p:txBody>
-          <a:bodyPr wrap="square" lIns="0" rIns="0" tIns="0" bIns="0">
+          <a:bodyPr wrap="square" lIns="0" tIns="0" rIns="0" bIns="0">
             <a:spAutoFit/>
           </a:bodyPr>
           <a:lstStyle/>
@@ -7190,7 +7457,7 @@
                 <a:solidFill>
                   <a:srgbClr val="1E293B"/>
                 </a:solidFill>
-                <a:latin typeface="Microsoft YaHei"/>
+                <a:latin typeface="微软雅黑" panose="020B0503020204020204" charset="-122"/>
               </a:defRPr>
             </a:pPr>
             <a:r>
@@ -7209,7 +7476,7 @@
                 <a:solidFill>
                   <a:srgbClr val="1E293B"/>
                 </a:solidFill>
-                <a:latin typeface="Microsoft YaHei"/>
+                <a:latin typeface="微软雅黑" panose="020B0503020204020204" charset="-122"/>
               </a:defRPr>
             </a:pPr>
             <a:r>
@@ -7228,7 +7495,7 @@
                 <a:solidFill>
                   <a:srgbClr val="1E293B"/>
                 </a:solidFill>
-                <a:latin typeface="Microsoft YaHei"/>
+                <a:latin typeface="微软雅黑" panose="020B0503020204020204" charset="-122"/>
               </a:defRPr>
             </a:pPr>
             <a:r>
@@ -7247,7 +7514,7 @@
                 <a:solidFill>
                   <a:srgbClr val="1E293B"/>
                 </a:solidFill>
-                <a:latin typeface="Microsoft YaHei"/>
+                <a:latin typeface="微软雅黑" panose="020B0503020204020204" charset="-122"/>
               </a:defRPr>
             </a:pPr>
             <a:r>
@@ -7256,6 +7523,30 @@
           </a:p>
         </p:txBody>
       </p:sp>
+      <p:pic>
+        <p:nvPicPr>
+          <p:cNvPr id="11" name="图片 10"/>
+          <p:cNvPicPr>
+            <a:picLocks noChangeAspect="1"/>
+          </p:cNvPicPr>
+          <p:nvPr/>
+        </p:nvPicPr>
+        <p:blipFill>
+          <a:blip r:embed="rId1"/>
+          <a:stretch>
+            <a:fillRect/>
+          </a:stretch>
+        </p:blipFill>
+        <p:spPr>
+          <a:xfrm>
+            <a:off x="1074420" y="2214880"/>
+            <a:ext cx="5615305" cy="2922270"/>
+          </a:xfrm>
+          <a:prstGeom prst="rect">
+            <a:avLst/>
+          </a:prstGeom>
+        </p:spPr>
+      </p:pic>
     </p:spTree>
   </p:cSld>
   <p:clrMapOvr>
@@ -7265,7 +7556,7 @@
 </file>
 
 <file path=ppt/slides/slide5.xml><?xml version="1.0" encoding="utf-8"?>
-<p:sld xmlns:a="http://schemas.openxmlformats.org/drawingml/2006/main" xmlns:p="http://schemas.openxmlformats.org/presentationml/2006/main" xmlns:r="http://schemas.openxmlformats.org/officeDocument/2006/relationships">
+<p:sld xmlns:a="http://schemas.openxmlformats.org/drawingml/2006/main" xmlns:r="http://schemas.openxmlformats.org/officeDocument/2006/relationships" xmlns:p="http://schemas.openxmlformats.org/presentationml/2006/main">
   <p:cSld>
     <p:bg>
       <p:bgPr>
@@ -7299,7 +7590,7 @@
           <a:noFill/>
         </p:spPr>
         <p:txBody>
-          <a:bodyPr wrap="square" lIns="0" rIns="0" tIns="0" bIns="0" anchor="t">
+          <a:bodyPr wrap="square" lIns="0" tIns="0" rIns="0" bIns="0" anchor="t">
             <a:spAutoFit/>
           </a:bodyPr>
           <a:lstStyle/>
@@ -7314,10 +7605,16 @@
                 <a:solidFill>
                   <a:srgbClr val="183B5B"/>
                 </a:solidFill>
-                <a:latin typeface="Microsoft YaHei"/>
+                <a:latin typeface="微软雅黑" panose="020B0503020204020204" charset="-122"/>
               </a:rPr>
               <a:t>历史记录与导出中心</a:t>
             </a:r>
+            <a:endParaRPr sz="2800" b="1">
+              <a:solidFill>
+                <a:srgbClr val="183B5B"/>
+              </a:solidFill>
+              <a:latin typeface="微软雅黑" panose="020B0503020204020204" charset="-122"/>
+            </a:endParaRPr>
           </a:p>
         </p:txBody>
       </p:sp>
@@ -7338,7 +7635,7 @@
           <a:noFill/>
         </p:spPr>
         <p:txBody>
-          <a:bodyPr wrap="square" lIns="0" rIns="0" tIns="0" bIns="0" anchor="t">
+          <a:bodyPr wrap="square" lIns="0" tIns="0" rIns="0" bIns="0" anchor="t">
             <a:spAutoFit/>
           </a:bodyPr>
           <a:lstStyle/>
@@ -7353,10 +7650,16 @@
                 <a:solidFill>
                   <a:srgbClr val="5B6B7A"/>
                 </a:solidFill>
-                <a:latin typeface="Microsoft YaHei"/>
+                <a:latin typeface="微软雅黑" panose="020B0503020204020204" charset="-122"/>
               </a:rPr>
               <a:t>处理结果不会停留在当前会话里，平台把“查找”“复用”“交付”放到了同一套体系。</a:t>
             </a:r>
+            <a:endParaRPr sz="1150" b="0">
+              <a:solidFill>
+                <a:srgbClr val="5B6B7A"/>
+              </a:solidFill>
+              <a:latin typeface="微软雅黑" panose="020B0503020204020204" charset="-122"/>
+            </a:endParaRPr>
           </a:p>
         </p:txBody>
       </p:sp>
@@ -7407,7 +7710,11 @@
         <p:nvSpPr>
           <p:cNvPr id="5" name="Rounded Rectangle 4"/>
           <p:cNvSpPr/>
-          <p:nvPr/>
+          <p:nvPr>
+            <p:custDataLst>
+              <p:tags r:id="rId1"/>
+            </p:custDataLst>
+          </p:nvPr>
         </p:nvSpPr>
         <p:spPr>
           <a:xfrm>
@@ -7454,10 +7761,14 @@
           <p:cNvPicPr>
             <a:picLocks noChangeAspect="1"/>
           </p:cNvPicPr>
-          <p:nvPr/>
+          <p:nvPr>
+            <p:custDataLst>
+              <p:tags r:id="rId2"/>
+            </p:custDataLst>
+          </p:nvPr>
         </p:nvPicPr>
         <p:blipFill>
-          <a:blip r:embed="rId2"/>
+          <a:blip r:embed="rId3"/>
           <a:stretch>
             <a:fillRect/>
           </a:stretch>
@@ -7476,7 +7787,11 @@
         <p:nvSpPr>
           <p:cNvPr id="7" name="TextBox 6"/>
           <p:cNvSpPr txBox="1"/>
-          <p:nvPr/>
+          <p:nvPr>
+            <p:custDataLst>
+              <p:tags r:id="rId4"/>
+            </p:custDataLst>
+          </p:nvPr>
         </p:nvSpPr>
         <p:spPr>
           <a:xfrm>
@@ -7489,7 +7804,7 @@
           <a:noFill/>
         </p:spPr>
         <p:txBody>
-          <a:bodyPr wrap="square" lIns="0" rIns="0" tIns="0" bIns="0" anchor="ctr">
+          <a:bodyPr wrap="square" lIns="0" tIns="0" rIns="0" bIns="0" anchor="ctr">
             <a:spAutoFit/>
           </a:bodyPr>
           <a:lstStyle/>
@@ -7504,10 +7819,16 @@
                 <a:solidFill>
                   <a:srgbClr val="5B6B7A"/>
                 </a:solidFill>
-                <a:latin typeface="Microsoft YaHei"/>
+                <a:latin typeface="微软雅黑" panose="020B0503020204020204" charset="-122"/>
               </a:rPr>
               <a:t>历史记录页面</a:t>
             </a:r>
+            <a:endParaRPr sz="1050" b="0">
+              <a:solidFill>
+                <a:srgbClr val="5B6B7A"/>
+              </a:solidFill>
+              <a:latin typeface="微软雅黑" panose="020B0503020204020204" charset="-122"/>
+            </a:endParaRPr>
           </a:p>
         </p:txBody>
       </p:sp>
@@ -7515,7 +7836,11 @@
         <p:nvSpPr>
           <p:cNvPr id="8" name="Rounded Rectangle 7"/>
           <p:cNvSpPr/>
-          <p:nvPr/>
+          <p:nvPr>
+            <p:custDataLst>
+              <p:tags r:id="rId5"/>
+            </p:custDataLst>
+          </p:nvPr>
         </p:nvSpPr>
         <p:spPr>
           <a:xfrm>
@@ -7556,35 +7881,15 @@
           </a:p>
         </p:txBody>
       </p:sp>
-      <p:pic>
-        <p:nvPicPr>
-          <p:cNvPr id="9" name="Picture 8" descr="03-exports.png"/>
-          <p:cNvPicPr>
-            <a:picLocks noChangeAspect="1"/>
-          </p:cNvPicPr>
-          <p:nvPr/>
-        </p:nvPicPr>
-        <p:blipFill>
-          <a:blip r:embed="rId3"/>
-          <a:stretch>
-            <a:fillRect/>
-          </a:stretch>
-        </p:blipFill>
-        <p:spPr>
-          <a:xfrm>
-            <a:off x="6455664" y="1516349"/>
-            <a:ext cx="5084064" cy="3889308"/>
-          </a:xfrm>
-          <a:prstGeom prst="rect">
-            <a:avLst/>
-          </a:prstGeom>
-        </p:spPr>
-      </p:pic>
       <p:sp>
         <p:nvSpPr>
           <p:cNvPr id="10" name="TextBox 9"/>
           <p:cNvSpPr txBox="1"/>
-          <p:nvPr/>
+          <p:nvPr>
+            <p:custDataLst>
+              <p:tags r:id="rId6"/>
+            </p:custDataLst>
+          </p:nvPr>
         </p:nvSpPr>
         <p:spPr>
           <a:xfrm>
@@ -7597,7 +7902,7 @@
           <a:noFill/>
         </p:spPr>
         <p:txBody>
-          <a:bodyPr wrap="square" lIns="0" rIns="0" tIns="0" bIns="0" anchor="ctr">
+          <a:bodyPr wrap="square" lIns="0" tIns="0" rIns="0" bIns="0" anchor="ctr">
             <a:spAutoFit/>
           </a:bodyPr>
           <a:lstStyle/>
@@ -7612,10 +7917,16 @@
                 <a:solidFill>
                   <a:srgbClr val="5B6B7A"/>
                 </a:solidFill>
-                <a:latin typeface="Microsoft YaHei"/>
+                <a:latin typeface="微软雅黑" panose="020B0503020204020204" charset="-122"/>
               </a:rPr>
               <a:t>导出中心页面</a:t>
             </a:r>
+            <a:endParaRPr sz="1050" b="0">
+              <a:solidFill>
+                <a:srgbClr val="5B6B7A"/>
+              </a:solidFill>
+              <a:latin typeface="微软雅黑" panose="020B0503020204020204" charset="-122"/>
+            </a:endParaRPr>
           </a:p>
         </p:txBody>
       </p:sp>
@@ -7636,7 +7947,7 @@
           <a:noFill/>
         </p:spPr>
         <p:txBody>
-          <a:bodyPr wrap="square" lIns="0" rIns="0" tIns="0" bIns="0">
+          <a:bodyPr wrap="square" lIns="0" tIns="0" rIns="0" bIns="0">
             <a:spAutoFit/>
           </a:bodyPr>
           <a:lstStyle/>
@@ -7652,7 +7963,7 @@
                 <a:solidFill>
                   <a:srgbClr val="1E293B"/>
                 </a:solidFill>
-                <a:latin typeface="Microsoft YaHei"/>
+                <a:latin typeface="微软雅黑" panose="020B0503020204020204" charset="-122"/>
               </a:defRPr>
             </a:pPr>
             <a:r>
@@ -7661,6 +7972,30 @@
           </a:p>
         </p:txBody>
       </p:sp>
+      <p:pic>
+        <p:nvPicPr>
+          <p:cNvPr id="12" name="图片 11"/>
+          <p:cNvPicPr>
+            <a:picLocks noChangeAspect="1"/>
+          </p:cNvPicPr>
+          <p:nvPr/>
+        </p:nvPicPr>
+        <p:blipFill>
+          <a:blip r:embed="rId7"/>
+          <a:stretch>
+            <a:fillRect/>
+          </a:stretch>
+        </p:blipFill>
+        <p:spPr>
+          <a:xfrm>
+            <a:off x="6630670" y="2477135"/>
+            <a:ext cx="4749165" cy="2174875"/>
+          </a:xfrm>
+          <a:prstGeom prst="rect">
+            <a:avLst/>
+          </a:prstGeom>
+        </p:spPr>
+      </p:pic>
     </p:spTree>
   </p:cSld>
   <p:clrMapOvr>
@@ -7670,7 +8005,7 @@
 </file>
 
 <file path=ppt/slides/slide6.xml><?xml version="1.0" encoding="utf-8"?>
-<p:sld xmlns:a="http://schemas.openxmlformats.org/drawingml/2006/main" xmlns:p="http://schemas.openxmlformats.org/presentationml/2006/main" xmlns:r="http://schemas.openxmlformats.org/officeDocument/2006/relationships">
+<p:sld xmlns:a="http://schemas.openxmlformats.org/drawingml/2006/main" xmlns:r="http://schemas.openxmlformats.org/officeDocument/2006/relationships" xmlns:p="http://schemas.openxmlformats.org/presentationml/2006/main">
   <p:cSld>
     <p:bg>
       <p:bgPr>
@@ -7704,7 +8039,7 @@
           <a:noFill/>
         </p:spPr>
         <p:txBody>
-          <a:bodyPr wrap="square" lIns="0" rIns="0" tIns="0" bIns="0" anchor="t">
+          <a:bodyPr wrap="square" lIns="0" tIns="0" rIns="0" bIns="0" anchor="t">
             <a:spAutoFit/>
           </a:bodyPr>
           <a:lstStyle/>
@@ -7719,10 +8054,16 @@
                 <a:solidFill>
                   <a:srgbClr val="183B5B"/>
                 </a:solidFill>
-                <a:latin typeface="Microsoft YaHei"/>
+                <a:latin typeface="微软雅黑" panose="020B0503020204020204" charset="-122"/>
               </a:rPr>
               <a:t>热词管理：把专业表达纠正到位</a:t>
             </a:r>
+            <a:endParaRPr sz="2800" b="1">
+              <a:solidFill>
+                <a:srgbClr val="183B5B"/>
+              </a:solidFill>
+              <a:latin typeface="微软雅黑" panose="020B0503020204020204" charset="-122"/>
+            </a:endParaRPr>
           </a:p>
         </p:txBody>
       </p:sp>
@@ -7743,7 +8084,7 @@
           <a:noFill/>
         </p:spPr>
         <p:txBody>
-          <a:bodyPr wrap="square" lIns="0" rIns="0" tIns="0" bIns="0" anchor="t">
+          <a:bodyPr wrap="square" lIns="0" tIns="0" rIns="0" bIns="0" anchor="t">
             <a:spAutoFit/>
           </a:bodyPr>
           <a:lstStyle/>
@@ -7758,10 +8099,16 @@
                 <a:solidFill>
                   <a:srgbClr val="5B6B7A"/>
                 </a:solidFill>
-                <a:latin typeface="Microsoft YaHei"/>
+                <a:latin typeface="微软雅黑" panose="020B0503020204020204" charset="-122"/>
               </a:rPr>
               <a:t>热词模块不是摆设，它直接影响后续处理结果，尤其适合技术词、缩写词和常见误识别场景。</a:t>
             </a:r>
+            <a:endParaRPr sz="1150" b="0">
+              <a:solidFill>
+                <a:srgbClr val="5B6B7A"/>
+              </a:solidFill>
+              <a:latin typeface="微软雅黑" panose="020B0503020204020204" charset="-122"/>
+            </a:endParaRPr>
           </a:p>
         </p:txBody>
       </p:sp>
@@ -7853,30 +8200,6 @@
           </a:p>
         </p:txBody>
       </p:sp>
-      <p:pic>
-        <p:nvPicPr>
-          <p:cNvPr id="6" name="Picture 5" descr="04-hotwords.png"/>
-          <p:cNvPicPr>
-            <a:picLocks noChangeAspect="1"/>
-          </p:cNvPicPr>
-          <p:nvPr/>
-        </p:nvPicPr>
-        <p:blipFill>
-          <a:blip r:embed="rId2"/>
-          <a:stretch>
-            <a:fillRect/>
-          </a:stretch>
-        </p:blipFill>
-        <p:spPr>
-          <a:xfrm>
-            <a:off x="1500112" y="1426464"/>
-            <a:ext cx="4607582" cy="4242816"/>
-          </a:xfrm>
-          <a:prstGeom prst="rect">
-            <a:avLst/>
-          </a:prstGeom>
-        </p:spPr>
-      </p:pic>
       <p:sp>
         <p:nvSpPr>
           <p:cNvPr id="7" name="TextBox 6"/>
@@ -7894,7 +8217,7 @@
           <a:noFill/>
         </p:spPr>
         <p:txBody>
-          <a:bodyPr wrap="square" lIns="0" rIns="0" tIns="0" bIns="0" anchor="ctr">
+          <a:bodyPr wrap="square" lIns="0" tIns="0" rIns="0" bIns="0" anchor="ctr">
             <a:spAutoFit/>
           </a:bodyPr>
           <a:lstStyle/>
@@ -7909,10 +8232,16 @@
                 <a:solidFill>
                   <a:srgbClr val="5B6B7A"/>
                 </a:solidFill>
-                <a:latin typeface="Microsoft YaHei"/>
+                <a:latin typeface="微软雅黑" panose="020B0503020204020204" charset="-122"/>
               </a:rPr>
               <a:t>热词管理页面</a:t>
             </a:r>
+            <a:endParaRPr sz="1050" b="0">
+              <a:solidFill>
+                <a:srgbClr val="5B6B7A"/>
+              </a:solidFill>
+              <a:latin typeface="微软雅黑" panose="020B0503020204020204" charset="-122"/>
+            </a:endParaRPr>
           </a:p>
         </p:txBody>
       </p:sp>
@@ -7978,7 +8307,7 @@
           <a:noFill/>
         </p:spPr>
         <p:txBody>
-          <a:bodyPr wrap="square" lIns="0" rIns="0" tIns="0" bIns="0" anchor="t">
+          <a:bodyPr wrap="square" lIns="0" tIns="0" rIns="0" bIns="0" anchor="t">
             <a:spAutoFit/>
           </a:bodyPr>
           <a:lstStyle/>
@@ -7993,10 +8322,16 @@
                 <a:solidFill>
                   <a:srgbClr val="0E7490"/>
                 </a:solidFill>
-                <a:latin typeface="Microsoft YaHei"/>
+                <a:latin typeface="微软雅黑" panose="020B0503020204020204" charset="-122"/>
               </a:rPr>
               <a:t>这个模块的价值</a:t>
             </a:r>
+            <a:endParaRPr sz="1600" b="1">
+              <a:solidFill>
+                <a:srgbClr val="0E7490"/>
+              </a:solidFill>
+              <a:latin typeface="微软雅黑" panose="020B0503020204020204" charset="-122"/>
+            </a:endParaRPr>
           </a:p>
         </p:txBody>
       </p:sp>
@@ -8017,7 +8352,7 @@
           <a:noFill/>
         </p:spPr>
         <p:txBody>
-          <a:bodyPr wrap="square" lIns="0" rIns="0" tIns="0" bIns="0">
+          <a:bodyPr wrap="square" lIns="0" tIns="0" rIns="0" bIns="0">
             <a:spAutoFit/>
           </a:bodyPr>
           <a:lstStyle/>
@@ -8033,7 +8368,7 @@
                 <a:solidFill>
                   <a:srgbClr val="1E293B"/>
                 </a:solidFill>
-                <a:latin typeface="Microsoft YaHei"/>
+                <a:latin typeface="微软雅黑" panose="020B0503020204020204" charset="-122"/>
               </a:defRPr>
             </a:pPr>
             <a:r>
@@ -8052,7 +8387,7 @@
                 <a:solidFill>
                   <a:srgbClr val="1E293B"/>
                 </a:solidFill>
-                <a:latin typeface="Microsoft YaHei"/>
+                <a:latin typeface="微软雅黑" panose="020B0503020204020204" charset="-122"/>
               </a:defRPr>
             </a:pPr>
             <a:r>
@@ -8071,7 +8406,7 @@
                 <a:solidFill>
                   <a:srgbClr val="1E293B"/>
                 </a:solidFill>
-                <a:latin typeface="Microsoft YaHei"/>
+                <a:latin typeface="微软雅黑" panose="020B0503020204020204" charset="-122"/>
               </a:defRPr>
             </a:pPr>
             <a:r>
@@ -8090,7 +8425,7 @@
                 <a:solidFill>
                   <a:srgbClr val="1E293B"/>
                 </a:solidFill>
-                <a:latin typeface="Microsoft YaHei"/>
+                <a:latin typeface="微软雅黑" panose="020B0503020204020204" charset="-122"/>
               </a:defRPr>
             </a:pPr>
             <a:r>
@@ -8099,6 +8434,30 @@
           </a:p>
         </p:txBody>
       </p:sp>
+      <p:pic>
+        <p:nvPicPr>
+          <p:cNvPr id="11" name="图片 10"/>
+          <p:cNvPicPr>
+            <a:picLocks noChangeAspect="1"/>
+          </p:cNvPicPr>
+          <p:nvPr/>
+        </p:nvPicPr>
+        <p:blipFill>
+          <a:blip r:embed="rId1"/>
+          <a:stretch>
+            <a:fillRect/>
+          </a:stretch>
+        </p:blipFill>
+        <p:spPr>
+          <a:xfrm>
+            <a:off x="862330" y="2286000"/>
+            <a:ext cx="5882005" cy="3035935"/>
+          </a:xfrm>
+          <a:prstGeom prst="rect">
+            <a:avLst/>
+          </a:prstGeom>
+        </p:spPr>
+      </p:pic>
     </p:spTree>
   </p:cSld>
   <p:clrMapOvr>
@@ -8108,7 +8467,7 @@
 </file>
 
 <file path=ppt/slides/slide7.xml><?xml version="1.0" encoding="utf-8"?>
-<p:sld xmlns:a="http://schemas.openxmlformats.org/drawingml/2006/main" xmlns:p="http://schemas.openxmlformats.org/presentationml/2006/main" xmlns:r="http://schemas.openxmlformats.org/officeDocument/2006/relationships">
+<p:sld xmlns:a="http://schemas.openxmlformats.org/drawingml/2006/main" xmlns:r="http://schemas.openxmlformats.org/officeDocument/2006/relationships" xmlns:p="http://schemas.openxmlformats.org/presentationml/2006/main">
   <p:cSld>
     <p:bg>
       <p:bgPr>
@@ -8142,7 +8501,7 @@
           <a:noFill/>
         </p:spPr>
         <p:txBody>
-          <a:bodyPr wrap="square" lIns="0" rIns="0" tIns="0" bIns="0" anchor="t">
+          <a:bodyPr wrap="square" lIns="0" tIns="0" rIns="0" bIns="0" anchor="t">
             <a:spAutoFit/>
           </a:bodyPr>
           <a:lstStyle/>
@@ -8157,10 +8516,16 @@
                 <a:solidFill>
                   <a:srgbClr val="183B5B"/>
                 </a:solidFill>
-                <a:latin typeface="Microsoft YaHei"/>
+                <a:latin typeface="微软雅黑" panose="020B0503020204020204" charset="-122"/>
               </a:rPr>
               <a:t>模型配置与使用统计</a:t>
             </a:r>
+            <a:endParaRPr sz="2800" b="1">
+              <a:solidFill>
+                <a:srgbClr val="183B5B"/>
+              </a:solidFill>
+              <a:latin typeface="微软雅黑" panose="020B0503020204020204" charset="-122"/>
+            </a:endParaRPr>
           </a:p>
         </p:txBody>
       </p:sp>
@@ -8181,7 +8546,7 @@
           <a:noFill/>
         </p:spPr>
         <p:txBody>
-          <a:bodyPr wrap="square" lIns="0" rIns="0" tIns="0" bIns="0" anchor="t">
+          <a:bodyPr wrap="square" lIns="0" tIns="0" rIns="0" bIns="0" anchor="t">
             <a:spAutoFit/>
           </a:bodyPr>
           <a:lstStyle/>
@@ -8196,10 +8561,16 @@
                 <a:solidFill>
                   <a:srgbClr val="5B6B7A"/>
                 </a:solidFill>
-                <a:latin typeface="Microsoft YaHei"/>
+                <a:latin typeface="微软雅黑" panose="020B0503020204020204" charset="-122"/>
               </a:rPr>
               <a:t>平台不仅能跑，还允许调策略、存模板、看统计，这让它更像一套可运维的产品。</a:t>
             </a:r>
+            <a:endParaRPr sz="1150" b="0">
+              <a:solidFill>
+                <a:srgbClr val="5B6B7A"/>
+              </a:solidFill>
+              <a:latin typeface="微软雅黑" panose="020B0503020204020204" charset="-122"/>
+            </a:endParaRPr>
           </a:p>
         </p:txBody>
       </p:sp>
@@ -8300,7 +8671,7 @@
           <p:nvPr/>
         </p:nvPicPr>
         <p:blipFill>
-          <a:blip r:embed="rId2"/>
+          <a:blip r:embed="rId1"/>
           <a:stretch>
             <a:fillRect/>
           </a:stretch>
@@ -8332,7 +8703,7 @@
           <a:noFill/>
         </p:spPr>
         <p:txBody>
-          <a:bodyPr wrap="square" lIns="0" rIns="0" tIns="0" bIns="0" anchor="ctr">
+          <a:bodyPr wrap="square" lIns="0" tIns="0" rIns="0" bIns="0" anchor="ctr">
             <a:spAutoFit/>
           </a:bodyPr>
           <a:lstStyle/>
@@ -8347,10 +8718,16 @@
                 <a:solidFill>
                   <a:srgbClr val="5B6B7A"/>
                 </a:solidFill>
-                <a:latin typeface="Microsoft YaHei"/>
+                <a:latin typeface="微软雅黑" panose="020B0503020204020204" charset="-122"/>
               </a:rPr>
               <a:t>模型配置页面</a:t>
             </a:r>
+            <a:endParaRPr sz="1050" b="0">
+              <a:solidFill>
+                <a:srgbClr val="5B6B7A"/>
+              </a:solidFill>
+              <a:latin typeface="微软雅黑" panose="020B0503020204020204" charset="-122"/>
+            </a:endParaRPr>
           </a:p>
         </p:txBody>
       </p:sp>
@@ -8371,7 +8748,7 @@
           <a:noFill/>
         </p:spPr>
         <p:txBody>
-          <a:bodyPr wrap="square" lIns="0" rIns="0" tIns="0" bIns="0">
+          <a:bodyPr wrap="square" lIns="0" tIns="0" rIns="0" bIns="0">
             <a:spAutoFit/>
           </a:bodyPr>
           <a:lstStyle/>
@@ -8387,7 +8764,7 @@
                 <a:solidFill>
                   <a:srgbClr val="1E293B"/>
                 </a:solidFill>
-                <a:latin typeface="Microsoft YaHei"/>
+                <a:latin typeface="微软雅黑" panose="020B0503020204020204" charset="-122"/>
               </a:defRPr>
             </a:pPr>
             <a:r>
@@ -8406,7 +8783,7 @@
                 <a:solidFill>
                   <a:srgbClr val="1E293B"/>
                 </a:solidFill>
-                <a:latin typeface="Microsoft YaHei"/>
+                <a:latin typeface="微软雅黑" panose="020B0503020204020204" charset="-122"/>
               </a:defRPr>
             </a:pPr>
             <a:r>
@@ -8425,7 +8802,7 @@
                 <a:solidFill>
                   <a:srgbClr val="1E293B"/>
                 </a:solidFill>
-                <a:latin typeface="Microsoft YaHei"/>
+                <a:latin typeface="微软雅黑" panose="020B0503020204020204" charset="-122"/>
               </a:defRPr>
             </a:pPr>
             <a:r>
@@ -8444,7 +8821,7 @@
                 <a:solidFill>
                   <a:srgbClr val="1E293B"/>
                 </a:solidFill>
-                <a:latin typeface="Microsoft YaHei"/>
+                <a:latin typeface="微软雅黑" panose="020B0503020204020204" charset="-122"/>
               </a:defRPr>
             </a:pPr>
             <a:r>
@@ -8462,7 +8839,7 @@
 </file>
 
 <file path=ppt/slides/slide8.xml><?xml version="1.0" encoding="utf-8"?>
-<p:sld xmlns:a="http://schemas.openxmlformats.org/drawingml/2006/main" xmlns:p="http://schemas.openxmlformats.org/presentationml/2006/main" xmlns:r="http://schemas.openxmlformats.org/officeDocument/2006/relationships">
+<p:sld xmlns:a="http://schemas.openxmlformats.org/drawingml/2006/main" xmlns:r="http://schemas.openxmlformats.org/officeDocument/2006/relationships" xmlns:p="http://schemas.openxmlformats.org/presentationml/2006/main">
   <p:cSld>
     <p:bg>
       <p:bgPr>
@@ -8496,7 +8873,7 @@
           <a:noFill/>
         </p:spPr>
         <p:txBody>
-          <a:bodyPr wrap="square" lIns="0" rIns="0" tIns="0" bIns="0" anchor="t">
+          <a:bodyPr wrap="square" lIns="0" tIns="0" rIns="0" bIns="0" anchor="t">
             <a:spAutoFit/>
           </a:bodyPr>
           <a:lstStyle/>
@@ -8511,10 +8888,16 @@
                 <a:solidFill>
                   <a:srgbClr val="183B5B"/>
                 </a:solidFill>
-                <a:latin typeface="Microsoft YaHei"/>
+                <a:latin typeface="微软雅黑" panose="020B0503020204020204" charset="-122"/>
               </a:rPr>
               <a:t>核心处理链路</a:t>
             </a:r>
+            <a:endParaRPr sz="2800" b="1">
+              <a:solidFill>
+                <a:srgbClr val="183B5B"/>
+              </a:solidFill>
+              <a:latin typeface="微软雅黑" panose="020B0503020204020204" charset="-122"/>
+            </a:endParaRPr>
           </a:p>
         </p:txBody>
       </p:sp>
@@ -8535,7 +8918,7 @@
           <a:noFill/>
         </p:spPr>
         <p:txBody>
-          <a:bodyPr wrap="square" lIns="0" rIns="0" tIns="0" bIns="0" anchor="t">
+          <a:bodyPr wrap="square" lIns="0" tIns="0" rIns="0" bIns="0" anchor="t">
             <a:spAutoFit/>
           </a:bodyPr>
           <a:lstStyle/>
@@ -8550,10 +8933,16 @@
                 <a:solidFill>
                   <a:srgbClr val="5B6B7A"/>
                 </a:solidFill>
-                <a:latin typeface="Microsoft YaHei"/>
+                <a:latin typeface="微软雅黑" panose="020B0503020204020204" charset="-122"/>
               </a:rPr>
               <a:t>从后端实现看，这套平台并不是前端本地拼结果，而是真正经过存储、识别、优化和落库。</a:t>
             </a:r>
+            <a:endParaRPr sz="1150" b="0">
+              <a:solidFill>
+                <a:srgbClr val="5B6B7A"/>
+              </a:solidFill>
+              <a:latin typeface="微软雅黑" panose="020B0503020204020204" charset="-122"/>
+            </a:endParaRPr>
           </a:p>
         </p:txBody>
       </p:sp>
@@ -8662,7 +9051,7 @@
           <a:noFill/>
         </p:spPr>
         <p:txBody>
-          <a:bodyPr wrap="square" lIns="0" rIns="0" tIns="0" bIns="0" anchor="ctr">
+          <a:bodyPr wrap="square" lIns="0" tIns="0" rIns="0" bIns="0" anchor="ctr">
             <a:spAutoFit/>
           </a:bodyPr>
           <a:lstStyle/>
@@ -8677,10 +9066,16 @@
                 <a:solidFill>
                   <a:srgbClr val="1E293B"/>
                 </a:solidFill>
-                <a:latin typeface="Microsoft YaHei"/>
+                <a:latin typeface="微软雅黑" panose="020B0503020204020204" charset="-122"/>
               </a:rPr>
               <a:t>上传音频</a:t>
             </a:r>
+            <a:endParaRPr sz="1250" b="1">
+              <a:solidFill>
+                <a:srgbClr val="1E293B"/>
+              </a:solidFill>
+              <a:latin typeface="微软雅黑" panose="020B0503020204020204" charset="-122"/>
+            </a:endParaRPr>
           </a:p>
         </p:txBody>
       </p:sp>
@@ -8781,7 +9176,7 @@
           <a:noFill/>
         </p:spPr>
         <p:txBody>
-          <a:bodyPr wrap="square" lIns="0" rIns="0" tIns="0" bIns="0" anchor="ctr">
+          <a:bodyPr wrap="square" lIns="0" tIns="0" rIns="0" bIns="0" anchor="ctr">
             <a:spAutoFit/>
           </a:bodyPr>
           <a:lstStyle/>
@@ -8796,10 +9191,16 @@
                 <a:solidFill>
                   <a:srgbClr val="1E293B"/>
                 </a:solidFill>
-                <a:latin typeface="Microsoft YaHei"/>
+                <a:latin typeface="微软雅黑" panose="020B0503020204020204" charset="-122"/>
               </a:rPr>
               <a:t>对象存储</a:t>
             </a:r>
+            <a:endParaRPr sz="1250" b="1">
+              <a:solidFill>
+                <a:srgbClr val="1E293B"/>
+              </a:solidFill>
+              <a:latin typeface="微软雅黑" panose="020B0503020204020204" charset="-122"/>
+            </a:endParaRPr>
           </a:p>
         </p:txBody>
       </p:sp>
@@ -8900,7 +9301,7 @@
           <a:noFill/>
         </p:spPr>
         <p:txBody>
-          <a:bodyPr wrap="square" lIns="0" rIns="0" tIns="0" bIns="0" anchor="ctr">
+          <a:bodyPr wrap="square" lIns="0" tIns="0" rIns="0" bIns="0" anchor="ctr">
             <a:spAutoFit/>
           </a:bodyPr>
           <a:lstStyle/>
@@ -8915,10 +9316,16 @@
                 <a:solidFill>
                   <a:srgbClr val="1E293B"/>
                 </a:solidFill>
-                <a:latin typeface="Microsoft YaHei"/>
+                <a:latin typeface="微软雅黑" panose="020B0503020204020204" charset="-122"/>
               </a:rPr>
               <a:t>语音识别</a:t>
             </a:r>
+            <a:endParaRPr sz="1250" b="1">
+              <a:solidFill>
+                <a:srgbClr val="1E293B"/>
+              </a:solidFill>
+              <a:latin typeface="微软雅黑" panose="020B0503020204020204" charset="-122"/>
+            </a:endParaRPr>
           </a:p>
         </p:txBody>
       </p:sp>
@@ -9019,7 +9426,7 @@
           <a:noFill/>
         </p:spPr>
         <p:txBody>
-          <a:bodyPr wrap="square" lIns="0" rIns="0" tIns="0" bIns="0" anchor="ctr">
+          <a:bodyPr wrap="square" lIns="0" tIns="0" rIns="0" bIns="0" anchor="ctr">
             <a:spAutoFit/>
           </a:bodyPr>
           <a:lstStyle/>
@@ -9034,10 +9441,16 @@
                 <a:solidFill>
                   <a:srgbClr val="1E293B"/>
                 </a:solidFill>
-                <a:latin typeface="Microsoft YaHei"/>
+                <a:latin typeface="微软雅黑" panose="020B0503020204020204" charset="-122"/>
               </a:rPr>
               <a:t>热词修正</a:t>
             </a:r>
+            <a:endParaRPr sz="1250" b="1">
+              <a:solidFill>
+                <a:srgbClr val="1E293B"/>
+              </a:solidFill>
+              <a:latin typeface="微软雅黑" panose="020B0503020204020204" charset="-122"/>
+            </a:endParaRPr>
           </a:p>
         </p:txBody>
       </p:sp>
@@ -9138,7 +9551,7 @@
           <a:noFill/>
         </p:spPr>
         <p:txBody>
-          <a:bodyPr wrap="square" lIns="0" rIns="0" tIns="0" bIns="0" anchor="ctr">
+          <a:bodyPr wrap="square" lIns="0" tIns="0" rIns="0" bIns="0" anchor="ctr">
             <a:spAutoFit/>
           </a:bodyPr>
           <a:lstStyle/>
@@ -9153,10 +9566,16 @@
                 <a:solidFill>
                   <a:srgbClr val="1E293B"/>
                 </a:solidFill>
-                <a:latin typeface="Microsoft YaHei"/>
+                <a:latin typeface="微软雅黑" panose="020B0503020204020204" charset="-122"/>
               </a:rPr>
               <a:t>文本优化</a:t>
             </a:r>
+            <a:endParaRPr sz="1250" b="1">
+              <a:solidFill>
+                <a:srgbClr val="1E293B"/>
+              </a:solidFill>
+              <a:latin typeface="微软雅黑" panose="020B0503020204020204" charset="-122"/>
+            </a:endParaRPr>
           </a:p>
         </p:txBody>
       </p:sp>
@@ -9257,7 +9676,7 @@
           <a:noFill/>
         </p:spPr>
         <p:txBody>
-          <a:bodyPr wrap="square" lIns="0" rIns="0" tIns="0" bIns="0" anchor="ctr">
+          <a:bodyPr wrap="square" lIns="0" tIns="0" rIns="0" bIns="0" anchor="ctr">
             <a:spAutoFit/>
           </a:bodyPr>
           <a:lstStyle/>
@@ -9272,10 +9691,16 @@
                 <a:solidFill>
                   <a:srgbClr val="1E293B"/>
                 </a:solidFill>
-                <a:latin typeface="Microsoft YaHei"/>
+                <a:latin typeface="微软雅黑" panose="020B0503020204020204" charset="-122"/>
               </a:rPr>
               <a:t>结果回写</a:t>
             </a:r>
+            <a:endParaRPr sz="1250" b="1">
+              <a:solidFill>
+                <a:srgbClr val="1E293B"/>
+              </a:solidFill>
+              <a:latin typeface="微软雅黑" panose="020B0503020204020204" charset="-122"/>
+            </a:endParaRPr>
           </a:p>
         </p:txBody>
       </p:sp>
@@ -9376,7 +9801,7 @@
           <a:noFill/>
         </p:spPr>
         <p:txBody>
-          <a:bodyPr wrap="square" lIns="0" rIns="0" tIns="0" bIns="0" anchor="ctr">
+          <a:bodyPr wrap="square" lIns="0" tIns="0" rIns="0" bIns="0" anchor="ctr">
             <a:spAutoFit/>
           </a:bodyPr>
           <a:lstStyle/>
@@ -9391,10 +9816,16 @@
                 <a:solidFill>
                   <a:srgbClr val="1E293B"/>
                 </a:solidFill>
-                <a:latin typeface="Microsoft YaHei"/>
+                <a:latin typeface="微软雅黑" panose="020B0503020204020204" charset="-122"/>
               </a:rPr>
               <a:t>历史/导出</a:t>
             </a:r>
+            <a:endParaRPr sz="1250" b="1">
+              <a:solidFill>
+                <a:srgbClr val="1E293B"/>
+              </a:solidFill>
+              <a:latin typeface="微软雅黑" panose="020B0503020204020204" charset="-122"/>
+            </a:endParaRPr>
           </a:p>
         </p:txBody>
       </p:sp>
@@ -9415,7 +9846,7 @@
           <a:noFill/>
         </p:spPr>
         <p:txBody>
-          <a:bodyPr wrap="square" lIns="0" rIns="0" tIns="0" bIns="0">
+          <a:bodyPr wrap="square" lIns="0" tIns="0" rIns="0" bIns="0">
             <a:spAutoFit/>
           </a:bodyPr>
           <a:lstStyle/>
@@ -9431,7 +9862,7 @@
                 <a:solidFill>
                   <a:srgbClr val="1E293B"/>
                 </a:solidFill>
-                <a:latin typeface="Microsoft YaHei"/>
+                <a:latin typeface="微软雅黑" panose="020B0503020204020204" charset="-122"/>
               </a:defRPr>
             </a:pPr>
             <a:r>
@@ -9450,7 +9881,7 @@
                 <a:solidFill>
                   <a:srgbClr val="1E293B"/>
                 </a:solidFill>
-                <a:latin typeface="Microsoft YaHei"/>
+                <a:latin typeface="微软雅黑" panose="020B0503020204020204" charset="-122"/>
               </a:defRPr>
             </a:pPr>
             <a:r>
@@ -9469,7 +9900,7 @@
                 <a:solidFill>
                   <a:srgbClr val="1E293B"/>
                 </a:solidFill>
-                <a:latin typeface="Microsoft YaHei"/>
+                <a:latin typeface="微软雅黑" panose="020B0503020204020204" charset="-122"/>
               </a:defRPr>
             </a:pPr>
             <a:r>
@@ -9488,7 +9919,7 @@
                 <a:solidFill>
                   <a:srgbClr val="1E293B"/>
                 </a:solidFill>
-                <a:latin typeface="Microsoft YaHei"/>
+                <a:latin typeface="微软雅黑" panose="020B0503020204020204" charset="-122"/>
               </a:defRPr>
             </a:pPr>
             <a:r>
@@ -9506,7 +9937,7 @@
 </file>
 
 <file path=ppt/slides/slide9.xml><?xml version="1.0" encoding="utf-8"?>
-<p:sld xmlns:a="http://schemas.openxmlformats.org/drawingml/2006/main" xmlns:p="http://schemas.openxmlformats.org/presentationml/2006/main" xmlns:r="http://schemas.openxmlformats.org/officeDocument/2006/relationships">
+<p:sld xmlns:a="http://schemas.openxmlformats.org/drawingml/2006/main" xmlns:r="http://schemas.openxmlformats.org/officeDocument/2006/relationships" xmlns:p="http://schemas.openxmlformats.org/presentationml/2006/main">
   <p:cSld>
     <p:bg>
       <p:bgPr>
@@ -9540,7 +9971,7 @@
           <a:noFill/>
         </p:spPr>
         <p:txBody>
-          <a:bodyPr wrap="square" lIns="0" rIns="0" tIns="0" bIns="0" anchor="t">
+          <a:bodyPr wrap="square" lIns="0" tIns="0" rIns="0" bIns="0" anchor="t">
             <a:spAutoFit/>
           </a:bodyPr>
           <a:lstStyle/>
@@ -9555,10 +9986,16 @@
                 <a:solidFill>
                   <a:srgbClr val="183B5B"/>
                 </a:solidFill>
-                <a:latin typeface="Microsoft YaHei"/>
+                <a:latin typeface="微软雅黑" panose="020B0503020204020204" charset="-122"/>
               </a:rPr>
               <a:t>技术架构与部署方式</a:t>
             </a:r>
+            <a:endParaRPr sz="2800" b="1">
+              <a:solidFill>
+                <a:srgbClr val="183B5B"/>
+              </a:solidFill>
+              <a:latin typeface="微软雅黑" panose="020B0503020204020204" charset="-122"/>
+            </a:endParaRPr>
           </a:p>
         </p:txBody>
       </p:sp>
@@ -9579,7 +10016,7 @@
           <a:noFill/>
         </p:spPr>
         <p:txBody>
-          <a:bodyPr wrap="square" lIns="0" rIns="0" tIns="0" bIns="0" anchor="t">
+          <a:bodyPr wrap="square" lIns="0" tIns="0" rIns="0" bIns="0" anchor="t">
             <a:spAutoFit/>
           </a:bodyPr>
           <a:lstStyle/>
@@ -9594,10 +10031,16 @@
                 <a:solidFill>
                   <a:srgbClr val="5B6B7A"/>
                 </a:solidFill>
-                <a:latin typeface="Microsoft YaHei"/>
+                <a:latin typeface="微软雅黑" panose="020B0503020204020204" charset="-122"/>
               </a:rPr>
               <a:t>这套平台采用前后端分离设计，适合本地演示，也保留了后续扩展空间。</a:t>
             </a:r>
+            <a:endParaRPr sz="1150" b="0">
+              <a:solidFill>
+                <a:srgbClr val="5B6B7A"/>
+              </a:solidFill>
+              <a:latin typeface="微软雅黑" panose="020B0503020204020204" charset="-122"/>
+            </a:endParaRPr>
           </a:p>
         </p:txBody>
       </p:sp>
@@ -9749,7 +10192,7 @@
           <a:noFill/>
         </p:spPr>
         <p:txBody>
-          <a:bodyPr wrap="square" lIns="0" rIns="0" tIns="0" bIns="0" anchor="t">
+          <a:bodyPr wrap="square" lIns="0" tIns="0" rIns="0" bIns="0" anchor="t">
             <a:spAutoFit/>
           </a:bodyPr>
           <a:lstStyle/>
@@ -9764,10 +10207,16 @@
                 <a:solidFill>
                   <a:srgbClr val="1E293B"/>
                 </a:solidFill>
-                <a:latin typeface="Microsoft YaHei"/>
+                <a:latin typeface="微软雅黑" panose="020B0503020204020204" charset="-122"/>
               </a:rPr>
               <a:t>前端层</a:t>
             </a:r>
+            <a:endParaRPr sz="1600" b="1">
+              <a:solidFill>
+                <a:srgbClr val="1E293B"/>
+              </a:solidFill>
+              <a:latin typeface="微软雅黑" panose="020B0503020204020204" charset="-122"/>
+            </a:endParaRPr>
           </a:p>
         </p:txBody>
       </p:sp>
@@ -9788,7 +10237,7 @@
           <a:noFill/>
         </p:spPr>
         <p:txBody>
-          <a:bodyPr wrap="square" lIns="0" rIns="0" tIns="0" bIns="0" anchor="t">
+          <a:bodyPr wrap="square" lIns="0" tIns="0" rIns="0" bIns="0" anchor="t">
             <a:spAutoFit/>
           </a:bodyPr>
           <a:lstStyle/>
@@ -9803,11 +10252,17 @@
                 <a:solidFill>
                   <a:srgbClr val="5B6B7A"/>
                 </a:solidFill>
-                <a:latin typeface="Microsoft YaHei"/>
+                <a:latin typeface="微软雅黑" panose="020B0503020204020204" charset="-122"/>
               </a:rPr>
               <a:t>React + Vite + TypeScript
 负责工作台、历史、热词、导出和配置等页面。</a:t>
             </a:r>
+            <a:endParaRPr sz="1300" b="0">
+              <a:solidFill>
+                <a:srgbClr val="5B6B7A"/>
+              </a:solidFill>
+              <a:latin typeface="微软雅黑" panose="020B0503020204020204" charset="-122"/>
+            </a:endParaRPr>
           </a:p>
         </p:txBody>
       </p:sp>
@@ -9916,7 +10371,7 @@
           <a:noFill/>
         </p:spPr>
         <p:txBody>
-          <a:bodyPr wrap="square" lIns="0" rIns="0" tIns="0" bIns="0" anchor="t">
+          <a:bodyPr wrap="square" lIns="0" tIns="0" rIns="0" bIns="0" anchor="t">
             <a:spAutoFit/>
           </a:bodyPr>
           <a:lstStyle/>
@@ -9931,10 +10386,16 @@
                 <a:solidFill>
                   <a:srgbClr val="1E293B"/>
                 </a:solidFill>
-                <a:latin typeface="Microsoft YaHei"/>
+                <a:latin typeface="微软雅黑" panose="020B0503020204020204" charset="-122"/>
               </a:rPr>
               <a:t>后端层</a:t>
             </a:r>
+            <a:endParaRPr sz="1600" b="1">
+              <a:solidFill>
+                <a:srgbClr val="1E293B"/>
+              </a:solidFill>
+              <a:latin typeface="微软雅黑" panose="020B0503020204020204" charset="-122"/>
+            </a:endParaRPr>
           </a:p>
         </p:txBody>
       </p:sp>
@@ -9955,7 +10416,7 @@
           <a:noFill/>
         </p:spPr>
         <p:txBody>
-          <a:bodyPr wrap="square" lIns="0" rIns="0" tIns="0" bIns="0" anchor="t">
+          <a:bodyPr wrap="square" lIns="0" tIns="0" rIns="0" bIns="0" anchor="t">
             <a:spAutoFit/>
           </a:bodyPr>
           <a:lstStyle/>
@@ -9970,11 +10431,17 @@
                 <a:solidFill>
                   <a:srgbClr val="5B6B7A"/>
                 </a:solidFill>
-                <a:latin typeface="Microsoft YaHei"/>
+                <a:latin typeface="微软雅黑" panose="020B0503020204020204" charset="-122"/>
               </a:rPr>
               <a:t>Spring Boot 3 + JPA + Flyway
 负责任务处理、接口编排、导出生成和统计聚合。</a:t>
             </a:r>
+            <a:endParaRPr sz="1300" b="0">
+              <a:solidFill>
+                <a:srgbClr val="5B6B7A"/>
+              </a:solidFill>
+              <a:latin typeface="微软雅黑" panose="020B0503020204020204" charset="-122"/>
+            </a:endParaRPr>
           </a:p>
         </p:txBody>
       </p:sp>
@@ -10083,7 +10550,7 @@
           <a:noFill/>
         </p:spPr>
         <p:txBody>
-          <a:bodyPr wrap="square" lIns="0" rIns="0" tIns="0" bIns="0" anchor="t">
+          <a:bodyPr wrap="square" lIns="0" tIns="0" rIns="0" bIns="0" anchor="t">
             <a:spAutoFit/>
           </a:bodyPr>
           <a:lstStyle/>
@@ -10098,10 +10565,16 @@
                 <a:solidFill>
                   <a:srgbClr val="1E293B"/>
                 </a:solidFill>
-                <a:latin typeface="Microsoft YaHei"/>
+                <a:latin typeface="微软雅黑" panose="020B0503020204020204" charset="-122"/>
               </a:rPr>
               <a:t>数据与中间件</a:t>
             </a:r>
+            <a:endParaRPr sz="1600" b="1">
+              <a:solidFill>
+                <a:srgbClr val="1E293B"/>
+              </a:solidFill>
+              <a:latin typeface="微软雅黑" panose="020B0503020204020204" charset="-122"/>
+            </a:endParaRPr>
           </a:p>
         </p:txBody>
       </p:sp>
@@ -10122,7 +10595,7 @@
           <a:noFill/>
         </p:spPr>
         <p:txBody>
-          <a:bodyPr wrap="square" lIns="0" rIns="0" tIns="0" bIns="0" anchor="t">
+          <a:bodyPr wrap="square" lIns="0" tIns="0" rIns="0" bIns="0" anchor="t">
             <a:spAutoFit/>
           </a:bodyPr>
           <a:lstStyle/>
@@ -10137,11 +10610,17 @@
                 <a:solidFill>
                   <a:srgbClr val="5B6B7A"/>
                 </a:solidFill>
-                <a:latin typeface="Microsoft YaHei"/>
+                <a:latin typeface="微软雅黑" panose="020B0503020204020204" charset="-122"/>
               </a:rPr>
               <a:t>PostgreSQL + Redis + MinIO
 分别承担持久化、状态/缓存与文件对象存储。</a:t>
             </a:r>
+            <a:endParaRPr sz="1300" b="0">
+              <a:solidFill>
+                <a:srgbClr val="5B6B7A"/>
+              </a:solidFill>
+              <a:latin typeface="微软雅黑" panose="020B0503020204020204" charset="-122"/>
+            </a:endParaRPr>
           </a:p>
         </p:txBody>
       </p:sp>
@@ -10250,7 +10729,7 @@
           <a:noFill/>
         </p:spPr>
         <p:txBody>
-          <a:bodyPr wrap="square" lIns="0" rIns="0" tIns="0" bIns="0" anchor="t">
+          <a:bodyPr wrap="square" lIns="0" tIns="0" rIns="0" bIns="0" anchor="t">
             <a:spAutoFit/>
           </a:bodyPr>
           <a:lstStyle/>
@@ -10265,10 +10744,16 @@
                 <a:solidFill>
                   <a:srgbClr val="1E293B"/>
                 </a:solidFill>
-                <a:latin typeface="Microsoft YaHei"/>
+                <a:latin typeface="微软雅黑" panose="020B0503020204020204" charset="-122"/>
               </a:rPr>
               <a:t>部署方式</a:t>
             </a:r>
+            <a:endParaRPr sz="1600" b="1">
+              <a:solidFill>
+                <a:srgbClr val="1E293B"/>
+              </a:solidFill>
+              <a:latin typeface="微软雅黑" panose="020B0503020204020204" charset="-122"/>
+            </a:endParaRPr>
           </a:p>
         </p:txBody>
       </p:sp>
@@ -10289,7 +10774,7 @@
           <a:noFill/>
         </p:spPr>
         <p:txBody>
-          <a:bodyPr wrap="square" lIns="0" rIns="0" tIns="0" bIns="0" anchor="t">
+          <a:bodyPr wrap="square" lIns="0" tIns="0" rIns="0" bIns="0" anchor="t">
             <a:spAutoFit/>
           </a:bodyPr>
           <a:lstStyle/>
@@ -10304,11 +10789,17 @@
                 <a:solidFill>
                   <a:srgbClr val="5B6B7A"/>
                 </a:solidFill>
-                <a:latin typeface="Microsoft YaHei"/>
+                <a:latin typeface="微软雅黑" panose="020B0503020204020204" charset="-122"/>
               </a:rPr>
               <a:t>Docker Compose 一键拉起
 适合课堂环境和演示机器快速复现。</a:t>
             </a:r>
+            <a:endParaRPr sz="1300" b="0">
+              <a:solidFill>
+                <a:srgbClr val="5B6B7A"/>
+              </a:solidFill>
+              <a:latin typeface="微软雅黑" panose="020B0503020204020204" charset="-122"/>
+            </a:endParaRPr>
           </a:p>
         </p:txBody>
       </p:sp>
@@ -10329,7 +10820,7 @@
           <a:noFill/>
         </p:spPr>
         <p:txBody>
-          <a:bodyPr wrap="square" lIns="0" rIns="0" tIns="0" bIns="0" anchor="t">
+          <a:bodyPr wrap="square" lIns="0" tIns="0" rIns="0" bIns="0" anchor="t">
             <a:spAutoFit/>
           </a:bodyPr>
           <a:lstStyle/>
@@ -10344,10 +10835,16 @@
                 <a:solidFill>
                   <a:srgbClr val="5B6B7A"/>
                 </a:solidFill>
-                <a:latin typeface="Microsoft YaHei"/>
+                <a:latin typeface="微软雅黑" panose="020B0503020204020204" charset="-122"/>
               </a:rPr>
               <a:t>项目当前支持本地通过 Docker 启动核心服务，适合在验收现场直接演示页面、接口和导出效果。</a:t>
             </a:r>
+            <a:endParaRPr sz="1350" b="0">
+              <a:solidFill>
+                <a:srgbClr val="5B6B7A"/>
+              </a:solidFill>
+              <a:latin typeface="微软雅黑" panose="020B0503020204020204" charset="-122"/>
+            </a:endParaRPr>
           </a:p>
         </p:txBody>
       </p:sp>
@@ -10357,6 +10854,36 @@
     <a:masterClrMapping/>
   </p:clrMapOvr>
 </p:sld>
+</file>
+
+<file path=ppt/tags/tag1.xml><?xml version="1.0" encoding="utf-8"?>
+<p:tagLst xmlns:p="http://schemas.openxmlformats.org/presentationml/2006/main">
+  <p:tag name="KSO_WM_DIAGRAM_VIRTUALLY_FRAME" val="{&quot;height&quot;:356.4,&quot;left&quot;:44.64,&quot;top&quot;:111.6,&quot;width&quot;:869.76}"/>
+</p:tagLst>
+</file>
+
+<file path=ppt/tags/tag2.xml><?xml version="1.0" encoding="utf-8"?>
+<p:tagLst xmlns:p="http://schemas.openxmlformats.org/presentationml/2006/main">
+  <p:tag name="KSO_WM_DIAGRAM_VIRTUALLY_FRAME" val="{&quot;height&quot;:356.4,&quot;left&quot;:44.64,&quot;top&quot;:111.6,&quot;width&quot;:869.76}"/>
+</p:tagLst>
+</file>
+
+<file path=ppt/tags/tag3.xml><?xml version="1.0" encoding="utf-8"?>
+<p:tagLst xmlns:p="http://schemas.openxmlformats.org/presentationml/2006/main">
+  <p:tag name="KSO_WM_DIAGRAM_VIRTUALLY_FRAME" val="{&quot;height&quot;:356.4,&quot;left&quot;:44.64,&quot;top&quot;:111.6,&quot;width&quot;:869.76}"/>
+</p:tagLst>
+</file>
+
+<file path=ppt/tags/tag4.xml><?xml version="1.0" encoding="utf-8"?>
+<p:tagLst xmlns:p="http://schemas.openxmlformats.org/presentationml/2006/main">
+  <p:tag name="KSO_WM_DIAGRAM_VIRTUALLY_FRAME" val="{&quot;height&quot;:356.4,&quot;left&quot;:44.64,&quot;top&quot;:111.6,&quot;width&quot;:869.76}"/>
+</p:tagLst>
+</file>
+
+<file path=ppt/tags/tag5.xml><?xml version="1.0" encoding="utf-8"?>
+<p:tagLst xmlns:p="http://schemas.openxmlformats.org/presentationml/2006/main">
+  <p:tag name="KSO_WM_DIAGRAM_VIRTUALLY_FRAME" val="{&quot;height&quot;:356.4,&quot;left&quot;:44.64,&quot;top&quot;:111.6,&quot;width&quot;:869.76}"/>
+</p:tagLst>
 </file>
 
 <file path=ppt/theme/theme1.xml><?xml version="1.0" encoding="utf-8"?>
@@ -10675,6 +11202,10 @@
       </a:style>
     </a:lnDef>
   </a:objectDefaults>
-  <a:extraClrSchemeLst/>
+  <a:extLst>
+    <a:ext uri="{05A4C25C-085E-4340-85A3-A5531E510DB2}">
+      <thm15:themeFamily xmlns:thm15="http://schemas.microsoft.com/office/thememl/2012/main" name="Office Theme" id="{62F939B6-93AF-4DB8-9C6B-D6C7DFDC589F}" vid="{4A3C46E8-61CC-4603-A589-7422A47A8E4A}"/>
+    </a:ext>
+  </a:extLst>
 </a:theme>
 </file>